--- a/teaching/2026Summer/5070/Slides/3.pptx
+++ b/teaching/2026Summer/5070/Slides/3.pptx
@@ -47,6 +47,915 @@
     </p:ext>
   </p:extLst>
 </p:presentation>
+</file>
+
+<file path=ppt/revisionInfo.xml><?xml version="1.0" encoding="utf-8"?>
+<p1510:revInfo xmlns:a="http://schemas.openxmlformats.org/drawingml/2006/main" xmlns:r="http://schemas.openxmlformats.org/officeDocument/2006/relationships" xmlns:p1510="http://schemas.microsoft.com/office/powerpoint/2015/10/main">
+  <p1510:revLst>
+    <p1510:client id="{7DE2EEF9-2248-B046-8856-D77D05DCA0F3}" v="80" dt="2026-05-29T19:40:52.913"/>
+  </p1510:revLst>
+</p1510:revInfo>
+</file>
+
+<file path=ppt/changesInfos/changesInfo1.xml><?xml version="1.0" encoding="utf-8"?>
+<pc:chgInfo xmlns:a="http://schemas.openxmlformats.org/drawingml/2006/main" xmlns:r="http://schemas.openxmlformats.org/officeDocument/2006/relationships" xmlns:ac="http://schemas.microsoft.com/office/drawing/2013/main/command" xmlns:pc="http://schemas.microsoft.com/office/powerpoint/2013/main/command">
+  <pc:docChgLst>
+    <pc:chgData name="Kun Suo" userId="41c30799-3a2b-4880-86a3-8488be07954a" providerId="ADAL" clId="{01B90814-4EBE-5562-8795-CE1E7277191D}"/>
+    <pc:docChg chg="undo custSel modSld">
+      <pc:chgData name="Kun Suo" userId="41c30799-3a2b-4880-86a3-8488be07954a" providerId="ADAL" clId="{01B90814-4EBE-5562-8795-CE1E7277191D}" dt="2026-05-29T19:43:19.052" v="206" actId="207"/>
+      <pc:docMkLst>
+        <pc:docMk/>
+      </pc:docMkLst>
+      <pc:sldChg chg="modSp mod">
+        <pc:chgData name="Kun Suo" userId="41c30799-3a2b-4880-86a3-8488be07954a" providerId="ADAL" clId="{01B90814-4EBE-5562-8795-CE1E7277191D}" dt="2026-05-28T00:29:21.047" v="0"/>
+        <pc:sldMkLst>
+          <pc:docMk/>
+          <pc:sldMk cId="0" sldId="256"/>
+        </pc:sldMkLst>
+        <pc:spChg chg="mod">
+          <ac:chgData name="Kun Suo" userId="41c30799-3a2b-4880-86a3-8488be07954a" providerId="ADAL" clId="{01B90814-4EBE-5562-8795-CE1E7277191D}" dt="2026-05-28T00:29:21.047" v="0"/>
+          <ac:spMkLst>
+            <pc:docMk/>
+            <pc:sldMk cId="0" sldId="256"/>
+            <ac:spMk id="12" creationId="{00000000-0000-0000-0000-000000000000}"/>
+          </ac:spMkLst>
+        </pc:spChg>
+      </pc:sldChg>
+      <pc:sldChg chg="modSp mod">
+        <pc:chgData name="Kun Suo" userId="41c30799-3a2b-4880-86a3-8488be07954a" providerId="ADAL" clId="{01B90814-4EBE-5562-8795-CE1E7277191D}" dt="2026-05-29T15:26:39.812" v="9" actId="20577"/>
+        <pc:sldMkLst>
+          <pc:docMk/>
+          <pc:sldMk cId="0" sldId="258"/>
+        </pc:sldMkLst>
+        <pc:spChg chg="mod">
+          <ac:chgData name="Kun Suo" userId="41c30799-3a2b-4880-86a3-8488be07954a" providerId="ADAL" clId="{01B90814-4EBE-5562-8795-CE1E7277191D}" dt="2026-05-29T15:26:39.812" v="9" actId="20577"/>
+          <ac:spMkLst>
+            <pc:docMk/>
+            <pc:sldMk cId="0" sldId="258"/>
+            <ac:spMk id="15" creationId="{00000000-0000-0000-0000-000000000000}"/>
+          </ac:spMkLst>
+        </pc:spChg>
+      </pc:sldChg>
+      <pc:sldChg chg="addSp delSp modSp mod">
+        <pc:chgData name="Kun Suo" userId="41c30799-3a2b-4880-86a3-8488be07954a" providerId="ADAL" clId="{01B90814-4EBE-5562-8795-CE1E7277191D}" dt="2026-05-29T19:02:30.200" v="26"/>
+        <pc:sldMkLst>
+          <pc:docMk/>
+          <pc:sldMk cId="0" sldId="259"/>
+        </pc:sldMkLst>
+        <pc:grpChg chg="del mod">
+          <ac:chgData name="Kun Suo" userId="41c30799-3a2b-4880-86a3-8488be07954a" providerId="ADAL" clId="{01B90814-4EBE-5562-8795-CE1E7277191D}" dt="2026-05-29T19:01:57.824" v="17"/>
+          <ac:grpSpMkLst>
+            <pc:docMk/>
+            <pc:sldMk cId="0" sldId="259"/>
+            <ac:grpSpMk id="34" creationId="{F3E9F1C6-6EF4-00DC-5E83-BDBC6F7A7A89}"/>
+          </ac:grpSpMkLst>
+        </pc:grpChg>
+        <pc:grpChg chg="del mod">
+          <ac:chgData name="Kun Suo" userId="41c30799-3a2b-4880-86a3-8488be07954a" providerId="ADAL" clId="{01B90814-4EBE-5562-8795-CE1E7277191D}" dt="2026-05-29T19:02:30.200" v="23"/>
+          <ac:grpSpMkLst>
+            <pc:docMk/>
+            <pc:sldMk cId="0" sldId="259"/>
+            <ac:grpSpMk id="35" creationId="{67B0F6DF-BCDD-4773-5B22-18DD26117961}"/>
+          </ac:grpSpMkLst>
+        </pc:grpChg>
+        <pc:grpChg chg="del mod">
+          <ac:chgData name="Kun Suo" userId="41c30799-3a2b-4880-86a3-8488be07954a" providerId="ADAL" clId="{01B90814-4EBE-5562-8795-CE1E7277191D}" dt="2026-05-29T19:01:57.824" v="17"/>
+          <ac:grpSpMkLst>
+            <pc:docMk/>
+            <pc:sldMk cId="0" sldId="259"/>
+            <ac:grpSpMk id="36" creationId="{B0BB5F2F-992E-48DD-D435-FD8A0D30E9AD}"/>
+          </ac:grpSpMkLst>
+        </pc:grpChg>
+        <pc:grpChg chg="del mod">
+          <ac:chgData name="Kun Suo" userId="41c30799-3a2b-4880-86a3-8488be07954a" providerId="ADAL" clId="{01B90814-4EBE-5562-8795-CE1E7277191D}" dt="2026-05-29T19:02:30.199" v="21"/>
+          <ac:grpSpMkLst>
+            <pc:docMk/>
+            <pc:sldMk cId="0" sldId="259"/>
+            <ac:grpSpMk id="37" creationId="{730EC6B1-BBDD-EEC4-3057-A8B172F935C4}"/>
+          </ac:grpSpMkLst>
+        </pc:grpChg>
+        <pc:inkChg chg="add del">
+          <ac:chgData name="Kun Suo" userId="41c30799-3a2b-4880-86a3-8488be07954a" providerId="ADAL" clId="{01B90814-4EBE-5562-8795-CE1E7277191D}" dt="2026-05-29T19:02:30.200" v="25"/>
+          <ac:inkMkLst>
+            <pc:docMk/>
+            <pc:sldMk cId="0" sldId="259"/>
+            <ac:inkMk id="27" creationId="{5D574E0E-82A8-7001-2B70-525F8EEA9594}"/>
+          </ac:inkMkLst>
+        </pc:inkChg>
+        <pc:inkChg chg="add del mod">
+          <ac:chgData name="Kun Suo" userId="41c30799-3a2b-4880-86a3-8488be07954a" providerId="ADAL" clId="{01B90814-4EBE-5562-8795-CE1E7277191D}" dt="2026-05-29T19:02:30.199" v="21"/>
+          <ac:inkMkLst>
+            <pc:docMk/>
+            <pc:sldMk cId="0" sldId="259"/>
+            <ac:inkMk id="28" creationId="{B8A1806A-BD32-0337-D9EA-2784E5E526AB}"/>
+          </ac:inkMkLst>
+        </pc:inkChg>
+        <pc:inkChg chg="add del mod">
+          <ac:chgData name="Kun Suo" userId="41c30799-3a2b-4880-86a3-8488be07954a" providerId="ADAL" clId="{01B90814-4EBE-5562-8795-CE1E7277191D}" dt="2026-05-29T19:02:30.199" v="20"/>
+          <ac:inkMkLst>
+            <pc:docMk/>
+            <pc:sldMk cId="0" sldId="259"/>
+            <ac:inkMk id="29" creationId="{63582F19-6955-6AC0-A57C-739EC3BB21E9}"/>
+          </ac:inkMkLst>
+        </pc:inkChg>
+        <pc:inkChg chg="add del mod">
+          <ac:chgData name="Kun Suo" userId="41c30799-3a2b-4880-86a3-8488be07954a" providerId="ADAL" clId="{01B90814-4EBE-5562-8795-CE1E7277191D}" dt="2026-05-29T19:02:30.199" v="22"/>
+          <ac:inkMkLst>
+            <pc:docMk/>
+            <pc:sldMk cId="0" sldId="259"/>
+            <ac:inkMk id="30" creationId="{9C155CC6-3049-A93A-8633-28EA7282A0C6}"/>
+          </ac:inkMkLst>
+        </pc:inkChg>
+        <pc:inkChg chg="add del mod">
+          <ac:chgData name="Kun Suo" userId="41c30799-3a2b-4880-86a3-8488be07954a" providerId="ADAL" clId="{01B90814-4EBE-5562-8795-CE1E7277191D}" dt="2026-05-29T19:02:30.200" v="24"/>
+          <ac:inkMkLst>
+            <pc:docMk/>
+            <pc:sldMk cId="0" sldId="259"/>
+            <ac:inkMk id="31" creationId="{DE8DBEF8-BA06-30EB-54E5-C4E564B1A756}"/>
+          </ac:inkMkLst>
+        </pc:inkChg>
+        <pc:inkChg chg="add del mod">
+          <ac:chgData name="Kun Suo" userId="41c30799-3a2b-4880-86a3-8488be07954a" providerId="ADAL" clId="{01B90814-4EBE-5562-8795-CE1E7277191D}" dt="2026-05-29T19:02:30.200" v="23"/>
+          <ac:inkMkLst>
+            <pc:docMk/>
+            <pc:sldMk cId="0" sldId="259"/>
+            <ac:inkMk id="32" creationId="{9A34F18D-C0D4-D2AE-D267-2BFFE5850244}"/>
+          </ac:inkMkLst>
+        </pc:inkChg>
+        <pc:inkChg chg="add del mod">
+          <ac:chgData name="Kun Suo" userId="41c30799-3a2b-4880-86a3-8488be07954a" providerId="ADAL" clId="{01B90814-4EBE-5562-8795-CE1E7277191D}" dt="2026-05-29T19:02:30.198" v="19"/>
+          <ac:inkMkLst>
+            <pc:docMk/>
+            <pc:sldMk cId="0" sldId="259"/>
+            <ac:inkMk id="33" creationId="{C177C74D-D0D1-78C4-BF45-A4083B5850D2}"/>
+          </ac:inkMkLst>
+        </pc:inkChg>
+        <pc:inkChg chg="add del">
+          <ac:chgData name="Kun Suo" userId="41c30799-3a2b-4880-86a3-8488be07954a" providerId="ADAL" clId="{01B90814-4EBE-5562-8795-CE1E7277191D}" dt="2026-05-29T19:02:30.200" v="26"/>
+          <ac:inkMkLst>
+            <pc:docMk/>
+            <pc:sldMk cId="0" sldId="259"/>
+            <ac:inkMk id="38" creationId="{56055BD8-8060-E910-2651-B9FD91580BE2}"/>
+          </ac:inkMkLst>
+        </pc:inkChg>
+      </pc:sldChg>
+      <pc:sldChg chg="modSp mod">
+        <pc:chgData name="Kun Suo" userId="41c30799-3a2b-4880-86a3-8488be07954a" providerId="ADAL" clId="{01B90814-4EBE-5562-8795-CE1E7277191D}" dt="2026-05-29T19:05:45.228" v="65" actId="20577"/>
+        <pc:sldMkLst>
+          <pc:docMk/>
+          <pc:sldMk cId="0" sldId="261"/>
+        </pc:sldMkLst>
+        <pc:spChg chg="mod">
+          <ac:chgData name="Kun Suo" userId="41c30799-3a2b-4880-86a3-8488be07954a" providerId="ADAL" clId="{01B90814-4EBE-5562-8795-CE1E7277191D}" dt="2026-05-29T19:05:45.228" v="65" actId="20577"/>
+          <ac:spMkLst>
+            <pc:docMk/>
+            <pc:sldMk cId="0" sldId="261"/>
+            <ac:spMk id="4" creationId="{00000000-0000-0000-0000-000000000000}"/>
+          </ac:spMkLst>
+        </pc:spChg>
+      </pc:sldChg>
+      <pc:sldChg chg="addSp delSp modSp mod">
+        <pc:chgData name="Kun Suo" userId="41c30799-3a2b-4880-86a3-8488be07954a" providerId="ADAL" clId="{01B90814-4EBE-5562-8795-CE1E7277191D}" dt="2026-05-29T19:34:47.854" v="134"/>
+        <pc:sldMkLst>
+          <pc:docMk/>
+          <pc:sldMk cId="0" sldId="266"/>
+        </pc:sldMkLst>
+        <pc:spChg chg="mod">
+          <ac:chgData name="Kun Suo" userId="41c30799-3a2b-4880-86a3-8488be07954a" providerId="ADAL" clId="{01B90814-4EBE-5562-8795-CE1E7277191D}" dt="2026-05-29T19:23:50.809" v="93" actId="20577"/>
+          <ac:spMkLst>
+            <pc:docMk/>
+            <pc:sldMk cId="0" sldId="266"/>
+            <ac:spMk id="13" creationId="{00000000-0000-0000-0000-000000000000}"/>
+          </ac:spMkLst>
+        </pc:spChg>
+        <pc:grpChg chg="del mod">
+          <ac:chgData name="Kun Suo" userId="41c30799-3a2b-4880-86a3-8488be07954a" providerId="ADAL" clId="{01B90814-4EBE-5562-8795-CE1E7277191D}" dt="2026-05-29T19:34:07.689" v="113"/>
+          <ac:grpSpMkLst>
+            <pc:docMk/>
+            <pc:sldMk cId="0" sldId="266"/>
+            <ac:grpSpMk id="31" creationId="{9F3F0FF9-F4DF-323F-6D8C-D641256C3F4A}"/>
+          </ac:grpSpMkLst>
+        </pc:grpChg>
+        <pc:grpChg chg="del mod">
+          <ac:chgData name="Kun Suo" userId="41c30799-3a2b-4880-86a3-8488be07954a" providerId="ADAL" clId="{01B90814-4EBE-5562-8795-CE1E7277191D}" dt="2026-05-29T19:34:47.852" v="126"/>
+          <ac:grpSpMkLst>
+            <pc:docMk/>
+            <pc:sldMk cId="0" sldId="266"/>
+            <ac:grpSpMk id="32" creationId="{AEF4041B-8F5E-8FCF-9644-805D564CAF70}"/>
+          </ac:grpSpMkLst>
+        </pc:grpChg>
+        <pc:grpChg chg="del mod">
+          <ac:chgData name="Kun Suo" userId="41c30799-3a2b-4880-86a3-8488be07954a" providerId="ADAL" clId="{01B90814-4EBE-5562-8795-CE1E7277191D}" dt="2026-05-29T19:34:32.426" v="120"/>
+          <ac:grpSpMkLst>
+            <pc:docMk/>
+            <pc:sldMk cId="0" sldId="266"/>
+            <ac:grpSpMk id="39" creationId="{38411A0E-D97C-5F1D-8CC3-E92DD77A1815}"/>
+          </ac:grpSpMkLst>
+        </pc:grpChg>
+        <pc:grpChg chg="del mod">
+          <ac:chgData name="Kun Suo" userId="41c30799-3a2b-4880-86a3-8488be07954a" providerId="ADAL" clId="{01B90814-4EBE-5562-8795-CE1E7277191D}" dt="2026-05-29T19:34:47.851" v="123"/>
+          <ac:grpSpMkLst>
+            <pc:docMk/>
+            <pc:sldMk cId="0" sldId="266"/>
+            <ac:grpSpMk id="40" creationId="{A177B866-629B-1E4D-A142-BD070352D2B4}"/>
+          </ac:grpSpMkLst>
+        </pc:grpChg>
+        <pc:picChg chg="add mod modCrop">
+          <ac:chgData name="Kun Suo" userId="41c30799-3a2b-4880-86a3-8488be07954a" providerId="ADAL" clId="{01B90814-4EBE-5562-8795-CE1E7277191D}" dt="2026-05-29T19:19:38.380" v="72" actId="1076"/>
+          <ac:picMkLst>
+            <pc:docMk/>
+            <pc:sldMk cId="0" sldId="266"/>
+            <ac:picMk id="18" creationId="{39491A1D-F489-7D62-9DDD-2BF42DB3230A}"/>
+          </ac:picMkLst>
+        </pc:picChg>
+        <pc:inkChg chg="add del">
+          <ac:chgData name="Kun Suo" userId="41c30799-3a2b-4880-86a3-8488be07954a" providerId="ADAL" clId="{01B90814-4EBE-5562-8795-CE1E7277191D}" dt="2026-05-29T19:23:42.540" v="79"/>
+          <ac:inkMkLst>
+            <pc:docMk/>
+            <pc:sldMk cId="0" sldId="266"/>
+            <ac:inkMk id="19" creationId="{580A325F-0943-3E88-DC4F-CAF303609A11}"/>
+          </ac:inkMkLst>
+        </pc:inkChg>
+        <pc:inkChg chg="add del">
+          <ac:chgData name="Kun Suo" userId="41c30799-3a2b-4880-86a3-8488be07954a" providerId="ADAL" clId="{01B90814-4EBE-5562-8795-CE1E7277191D}" dt="2026-05-29T19:23:42.541" v="80"/>
+          <ac:inkMkLst>
+            <pc:docMk/>
+            <pc:sldMk cId="0" sldId="266"/>
+            <ac:inkMk id="20" creationId="{AC3AA888-20C3-84F6-13CF-8DC99971EF5E}"/>
+          </ac:inkMkLst>
+        </pc:inkChg>
+        <pc:inkChg chg="add del">
+          <ac:chgData name="Kun Suo" userId="41c30799-3a2b-4880-86a3-8488be07954a" providerId="ADAL" clId="{01B90814-4EBE-5562-8795-CE1E7277191D}" dt="2026-05-29T19:23:42.540" v="78"/>
+          <ac:inkMkLst>
+            <pc:docMk/>
+            <pc:sldMk cId="0" sldId="266"/>
+            <ac:inkMk id="21" creationId="{1CA35249-5331-3575-876C-7005CE179EC3}"/>
+          </ac:inkMkLst>
+        </pc:inkChg>
+        <pc:inkChg chg="add del">
+          <ac:chgData name="Kun Suo" userId="41c30799-3a2b-4880-86a3-8488be07954a" providerId="ADAL" clId="{01B90814-4EBE-5562-8795-CE1E7277191D}" dt="2026-05-29T19:23:42.538" v="77"/>
+          <ac:inkMkLst>
+            <pc:docMk/>
+            <pc:sldMk cId="0" sldId="266"/>
+            <ac:inkMk id="22" creationId="{190B46A2-DC43-CA5F-A99F-2D6054348E26}"/>
+          </ac:inkMkLst>
+        </pc:inkChg>
+        <pc:inkChg chg="add del">
+          <ac:chgData name="Kun Suo" userId="41c30799-3a2b-4880-86a3-8488be07954a" providerId="ADAL" clId="{01B90814-4EBE-5562-8795-CE1E7277191D}" dt="2026-05-29T19:34:47.854" v="132"/>
+          <ac:inkMkLst>
+            <pc:docMk/>
+            <pc:sldMk cId="0" sldId="266"/>
+            <ac:inkMk id="23" creationId="{0A36D92D-C29D-02E2-D99B-8194C88EF90D}"/>
+          </ac:inkMkLst>
+        </pc:inkChg>
+        <pc:inkChg chg="add del">
+          <ac:chgData name="Kun Suo" userId="41c30799-3a2b-4880-86a3-8488be07954a" providerId="ADAL" clId="{01B90814-4EBE-5562-8795-CE1E7277191D}" dt="2026-05-29T19:34:47.854" v="133"/>
+          <ac:inkMkLst>
+            <pc:docMk/>
+            <pc:sldMk cId="0" sldId="266"/>
+            <ac:inkMk id="24" creationId="{EE5FE367-DCA2-159D-0C7E-3E54CDDA8FE9}"/>
+          </ac:inkMkLst>
+        </pc:inkChg>
+        <pc:inkChg chg="add del">
+          <ac:chgData name="Kun Suo" userId="41c30799-3a2b-4880-86a3-8488be07954a" providerId="ADAL" clId="{01B90814-4EBE-5562-8795-CE1E7277191D}" dt="2026-05-29T19:34:47.851" v="124"/>
+          <ac:inkMkLst>
+            <pc:docMk/>
+            <pc:sldMk cId="0" sldId="266"/>
+            <ac:inkMk id="25" creationId="{FCEEAC01-FEBE-C2F8-7E03-9CBCB69CEE05}"/>
+          </ac:inkMkLst>
+        </pc:inkChg>
+        <pc:inkChg chg="add del">
+          <ac:chgData name="Kun Suo" userId="41c30799-3a2b-4880-86a3-8488be07954a" providerId="ADAL" clId="{01B90814-4EBE-5562-8795-CE1E7277191D}" dt="2026-05-29T19:34:47.850" v="122"/>
+          <ac:inkMkLst>
+            <pc:docMk/>
+            <pc:sldMk cId="0" sldId="266"/>
+            <ac:inkMk id="26" creationId="{C21B7E08-1683-AADA-A7AA-DECD2D6164C8}"/>
+          </ac:inkMkLst>
+        </pc:inkChg>
+        <pc:inkChg chg="add del">
+          <ac:chgData name="Kun Suo" userId="41c30799-3a2b-4880-86a3-8488be07954a" providerId="ADAL" clId="{01B90814-4EBE-5562-8795-CE1E7277191D}" dt="2026-05-29T19:34:47.854" v="134"/>
+          <ac:inkMkLst>
+            <pc:docMk/>
+            <pc:sldMk cId="0" sldId="266"/>
+            <ac:inkMk id="27" creationId="{0CC9DF54-D833-1A27-C55A-7E7298C3F5DA}"/>
+          </ac:inkMkLst>
+        </pc:inkChg>
+        <pc:inkChg chg="add del">
+          <ac:chgData name="Kun Suo" userId="41c30799-3a2b-4880-86a3-8488be07954a" providerId="ADAL" clId="{01B90814-4EBE-5562-8795-CE1E7277191D}" dt="2026-05-29T19:34:47.851" v="125"/>
+          <ac:inkMkLst>
+            <pc:docMk/>
+            <pc:sldMk cId="0" sldId="266"/>
+            <ac:inkMk id="28" creationId="{76AA6577-21F9-728A-8C1D-4A35882E1493}"/>
+          </ac:inkMkLst>
+        </pc:inkChg>
+        <pc:inkChg chg="add del mod">
+          <ac:chgData name="Kun Suo" userId="41c30799-3a2b-4880-86a3-8488be07954a" providerId="ADAL" clId="{01B90814-4EBE-5562-8795-CE1E7277191D}" dt="2026-05-29T19:34:47.852" v="126"/>
+          <ac:inkMkLst>
+            <pc:docMk/>
+            <pc:sldMk cId="0" sldId="266"/>
+            <ac:inkMk id="29" creationId="{687DF1AF-B29E-4C94-D452-383539230E13}"/>
+          </ac:inkMkLst>
+        </pc:inkChg>
+        <pc:inkChg chg="add del mod">
+          <ac:chgData name="Kun Suo" userId="41c30799-3a2b-4880-86a3-8488be07954a" providerId="ADAL" clId="{01B90814-4EBE-5562-8795-CE1E7277191D}" dt="2026-05-29T19:34:47.852" v="127"/>
+          <ac:inkMkLst>
+            <pc:docMk/>
+            <pc:sldMk cId="0" sldId="266"/>
+            <ac:inkMk id="30" creationId="{BF0F1B7D-762C-0AE6-C948-6CD5843E2111}"/>
+          </ac:inkMkLst>
+        </pc:inkChg>
+        <pc:inkChg chg="add del">
+          <ac:chgData name="Kun Suo" userId="41c30799-3a2b-4880-86a3-8488be07954a" providerId="ADAL" clId="{01B90814-4EBE-5562-8795-CE1E7277191D}" dt="2026-05-29T19:34:47.852" v="129"/>
+          <ac:inkMkLst>
+            <pc:docMk/>
+            <pc:sldMk cId="0" sldId="266"/>
+            <ac:inkMk id="33" creationId="{C0AAE1A0-4983-914D-C5FF-268A88B5808A}"/>
+          </ac:inkMkLst>
+        </pc:inkChg>
+        <pc:inkChg chg="add del">
+          <ac:chgData name="Kun Suo" userId="41c30799-3a2b-4880-86a3-8488be07954a" providerId="ADAL" clId="{01B90814-4EBE-5562-8795-CE1E7277191D}" dt="2026-05-29T19:34:47.852" v="128"/>
+          <ac:inkMkLst>
+            <pc:docMk/>
+            <pc:sldMk cId="0" sldId="266"/>
+            <ac:inkMk id="34" creationId="{E332D610-8159-34BE-47CA-1A53A7824B17}"/>
+          </ac:inkMkLst>
+        </pc:inkChg>
+        <pc:inkChg chg="add del">
+          <ac:chgData name="Kun Suo" userId="41c30799-3a2b-4880-86a3-8488be07954a" providerId="ADAL" clId="{01B90814-4EBE-5562-8795-CE1E7277191D}" dt="2026-05-29T19:34:47.853" v="130"/>
+          <ac:inkMkLst>
+            <pc:docMk/>
+            <pc:sldMk cId="0" sldId="266"/>
+            <ac:inkMk id="35" creationId="{229607F8-5921-1C36-9508-CF3126CB31AB}"/>
+          </ac:inkMkLst>
+        </pc:inkChg>
+        <pc:inkChg chg="add del">
+          <ac:chgData name="Kun Suo" userId="41c30799-3a2b-4880-86a3-8488be07954a" providerId="ADAL" clId="{01B90814-4EBE-5562-8795-CE1E7277191D}" dt="2026-05-29T19:34:47.850" v="121"/>
+          <ac:inkMkLst>
+            <pc:docMk/>
+            <pc:sldMk cId="0" sldId="266"/>
+            <ac:inkMk id="36" creationId="{1A522221-A4E9-FD75-B257-FE3B92203360}"/>
+          </ac:inkMkLst>
+        </pc:inkChg>
+        <pc:inkChg chg="add del mod">
+          <ac:chgData name="Kun Suo" userId="41c30799-3a2b-4880-86a3-8488be07954a" providerId="ADAL" clId="{01B90814-4EBE-5562-8795-CE1E7277191D}" dt="2026-05-29T19:34:47.851" v="123"/>
+          <ac:inkMkLst>
+            <pc:docMk/>
+            <pc:sldMk cId="0" sldId="266"/>
+            <ac:inkMk id="37" creationId="{5254E084-D94D-64B5-457C-F4345A76B48C}"/>
+          </ac:inkMkLst>
+        </pc:inkChg>
+        <pc:inkChg chg="add del mod">
+          <ac:chgData name="Kun Suo" userId="41c30799-3a2b-4880-86a3-8488be07954a" providerId="ADAL" clId="{01B90814-4EBE-5562-8795-CE1E7277191D}" dt="2026-05-29T19:34:47.853" v="131"/>
+          <ac:inkMkLst>
+            <pc:docMk/>
+            <pc:sldMk cId="0" sldId="266"/>
+            <ac:inkMk id="38" creationId="{AF7AB50E-8E5B-E4F2-5C39-D63826967D94}"/>
+          </ac:inkMkLst>
+        </pc:inkChg>
+      </pc:sldChg>
+      <pc:sldChg chg="addSp delSp modSp mod">
+        <pc:chgData name="Kun Suo" userId="41c30799-3a2b-4880-86a3-8488be07954a" providerId="ADAL" clId="{01B90814-4EBE-5562-8795-CE1E7277191D}" dt="2026-05-29T19:37:55.727" v="164"/>
+        <pc:sldMkLst>
+          <pc:docMk/>
+          <pc:sldMk cId="0" sldId="267"/>
+        </pc:sldMkLst>
+        <pc:spChg chg="mod">
+          <ac:chgData name="Kun Suo" userId="41c30799-3a2b-4880-86a3-8488be07954a" providerId="ADAL" clId="{01B90814-4EBE-5562-8795-CE1E7277191D}" dt="2026-05-29T19:26:10.887" v="99" actId="1076"/>
+          <ac:spMkLst>
+            <pc:docMk/>
+            <pc:sldMk cId="0" sldId="267"/>
+            <ac:spMk id="5" creationId="{00000000-0000-0000-0000-000000000000}"/>
+          </ac:spMkLst>
+        </pc:spChg>
+        <pc:spChg chg="mod">
+          <ac:chgData name="Kun Suo" userId="41c30799-3a2b-4880-86a3-8488be07954a" providerId="ADAL" clId="{01B90814-4EBE-5562-8795-CE1E7277191D}" dt="2026-05-29T19:26:10.887" v="99" actId="1076"/>
+          <ac:spMkLst>
+            <pc:docMk/>
+            <pc:sldMk cId="0" sldId="267"/>
+            <ac:spMk id="6" creationId="{00000000-0000-0000-0000-000000000000}"/>
+          </ac:spMkLst>
+        </pc:spChg>
+        <pc:spChg chg="mod">
+          <ac:chgData name="Kun Suo" userId="41c30799-3a2b-4880-86a3-8488be07954a" providerId="ADAL" clId="{01B90814-4EBE-5562-8795-CE1E7277191D}" dt="2026-05-29T19:26:10.887" v="99" actId="1076"/>
+          <ac:spMkLst>
+            <pc:docMk/>
+            <pc:sldMk cId="0" sldId="267"/>
+            <ac:spMk id="12" creationId="{00000000-0000-0000-0000-000000000000}"/>
+          </ac:spMkLst>
+        </pc:spChg>
+        <pc:spChg chg="mod">
+          <ac:chgData name="Kun Suo" userId="41c30799-3a2b-4880-86a3-8488be07954a" providerId="ADAL" clId="{01B90814-4EBE-5562-8795-CE1E7277191D}" dt="2026-05-29T19:26:10.887" v="99" actId="1076"/>
+          <ac:spMkLst>
+            <pc:docMk/>
+            <pc:sldMk cId="0" sldId="267"/>
+            <ac:spMk id="13" creationId="{00000000-0000-0000-0000-000000000000}"/>
+          </ac:spMkLst>
+        </pc:spChg>
+        <pc:spChg chg="mod">
+          <ac:chgData name="Kun Suo" userId="41c30799-3a2b-4880-86a3-8488be07954a" providerId="ADAL" clId="{01B90814-4EBE-5562-8795-CE1E7277191D}" dt="2026-05-29T19:26:10.887" v="99" actId="1076"/>
+          <ac:spMkLst>
+            <pc:docMk/>
+            <pc:sldMk cId="0" sldId="267"/>
+            <ac:spMk id="18" creationId="{00000000-0000-0000-0000-000000000000}"/>
+          </ac:spMkLst>
+        </pc:spChg>
+        <pc:spChg chg="mod">
+          <ac:chgData name="Kun Suo" userId="41c30799-3a2b-4880-86a3-8488be07954a" providerId="ADAL" clId="{01B90814-4EBE-5562-8795-CE1E7277191D}" dt="2026-05-29T19:26:10.887" v="99" actId="1076"/>
+          <ac:spMkLst>
+            <pc:docMk/>
+            <pc:sldMk cId="0" sldId="267"/>
+            <ac:spMk id="22" creationId="{00000000-0000-0000-0000-000000000000}"/>
+          </ac:spMkLst>
+        </pc:spChg>
+        <pc:spChg chg="mod">
+          <ac:chgData name="Kun Suo" userId="41c30799-3a2b-4880-86a3-8488be07954a" providerId="ADAL" clId="{01B90814-4EBE-5562-8795-CE1E7277191D}" dt="2026-05-29T19:26:10.887" v="99" actId="1076"/>
+          <ac:spMkLst>
+            <pc:docMk/>
+            <pc:sldMk cId="0" sldId="267"/>
+            <ac:spMk id="24" creationId="{00000000-0000-0000-0000-000000000000}"/>
+          </ac:spMkLst>
+        </pc:spChg>
+        <pc:spChg chg="mod">
+          <ac:chgData name="Kun Suo" userId="41c30799-3a2b-4880-86a3-8488be07954a" providerId="ADAL" clId="{01B90814-4EBE-5562-8795-CE1E7277191D}" dt="2026-05-29T19:26:10.887" v="99" actId="1076"/>
+          <ac:spMkLst>
+            <pc:docMk/>
+            <pc:sldMk cId="0" sldId="267"/>
+            <ac:spMk id="25" creationId="{00000000-0000-0000-0000-000000000000}"/>
+          </ac:spMkLst>
+        </pc:spChg>
+        <pc:spChg chg="mod">
+          <ac:chgData name="Kun Suo" userId="41c30799-3a2b-4880-86a3-8488be07954a" providerId="ADAL" clId="{01B90814-4EBE-5562-8795-CE1E7277191D}" dt="2026-05-29T19:26:10.887" v="99" actId="1076"/>
+          <ac:spMkLst>
+            <pc:docMk/>
+            <pc:sldMk cId="0" sldId="267"/>
+            <ac:spMk id="27" creationId="{00000000-0000-0000-0000-000000000000}"/>
+          </ac:spMkLst>
+        </pc:spChg>
+        <pc:spChg chg="mod">
+          <ac:chgData name="Kun Suo" userId="41c30799-3a2b-4880-86a3-8488be07954a" providerId="ADAL" clId="{01B90814-4EBE-5562-8795-CE1E7277191D}" dt="2026-05-29T19:26:10.887" v="99" actId="1076"/>
+          <ac:spMkLst>
+            <pc:docMk/>
+            <pc:sldMk cId="0" sldId="267"/>
+            <ac:spMk id="29" creationId="{00000000-0000-0000-0000-000000000000}"/>
+          </ac:spMkLst>
+        </pc:spChg>
+        <pc:grpChg chg="del mod">
+          <ac:chgData name="Kun Suo" userId="41c30799-3a2b-4880-86a3-8488be07954a" providerId="ADAL" clId="{01B90814-4EBE-5562-8795-CE1E7277191D}" dt="2026-05-29T19:37:21.263" v="137"/>
+          <ac:grpSpMkLst>
+            <pc:docMk/>
+            <pc:sldMk cId="0" sldId="267"/>
+            <ac:grpSpMk id="33" creationId="{4205121B-5CD2-DD2E-4658-7DA534D87C1B}"/>
+          </ac:grpSpMkLst>
+        </pc:grpChg>
+        <pc:grpChg chg="del mod">
+          <ac:chgData name="Kun Suo" userId="41c30799-3a2b-4880-86a3-8488be07954a" providerId="ADAL" clId="{01B90814-4EBE-5562-8795-CE1E7277191D}" dt="2026-05-29T19:37:55.725" v="154"/>
+          <ac:grpSpMkLst>
+            <pc:docMk/>
+            <pc:sldMk cId="0" sldId="267"/>
+            <ac:grpSpMk id="34" creationId="{825605DC-CF63-8401-100D-99A67BCD2D0F}"/>
+          </ac:grpSpMkLst>
+        </pc:grpChg>
+        <pc:grpChg chg="del mod">
+          <ac:chgData name="Kun Suo" userId="41c30799-3a2b-4880-86a3-8488be07954a" providerId="ADAL" clId="{01B90814-4EBE-5562-8795-CE1E7277191D}" dt="2026-05-29T19:37:26.487" v="140"/>
+          <ac:grpSpMkLst>
+            <pc:docMk/>
+            <pc:sldMk cId="0" sldId="267"/>
+            <ac:grpSpMk id="37" creationId="{40E12E30-C602-5766-0185-2EE4EE64AA40}"/>
+          </ac:grpSpMkLst>
+        </pc:grpChg>
+        <pc:grpChg chg="del mod">
+          <ac:chgData name="Kun Suo" userId="41c30799-3a2b-4880-86a3-8488be07954a" providerId="ADAL" clId="{01B90814-4EBE-5562-8795-CE1E7277191D}" dt="2026-05-29T19:37:35.651" v="142"/>
+          <ac:grpSpMkLst>
+            <pc:docMk/>
+            <pc:sldMk cId="0" sldId="267"/>
+            <ac:grpSpMk id="38" creationId="{1383B64A-0682-B337-DBFB-C2750652A4E1}"/>
+          </ac:grpSpMkLst>
+        </pc:grpChg>
+        <pc:grpChg chg="del mod">
+          <ac:chgData name="Kun Suo" userId="41c30799-3a2b-4880-86a3-8488be07954a" providerId="ADAL" clId="{01B90814-4EBE-5562-8795-CE1E7277191D}" dt="2026-05-29T19:37:35.651" v="142"/>
+          <ac:grpSpMkLst>
+            <pc:docMk/>
+            <pc:sldMk cId="0" sldId="267"/>
+            <ac:grpSpMk id="40" creationId="{F608310B-57CD-B6E0-5B3E-5FB8518634E2}"/>
+          </ac:grpSpMkLst>
+        </pc:grpChg>
+        <pc:grpChg chg="del mod">
+          <ac:chgData name="Kun Suo" userId="41c30799-3a2b-4880-86a3-8488be07954a" providerId="ADAL" clId="{01B90814-4EBE-5562-8795-CE1E7277191D}" dt="2026-05-29T19:37:36.635" v="144"/>
+          <ac:grpSpMkLst>
+            <pc:docMk/>
+            <pc:sldMk cId="0" sldId="267"/>
+            <ac:grpSpMk id="41" creationId="{02FA590B-E11C-0F4A-A228-9FFC1E509E36}"/>
+          </ac:grpSpMkLst>
+        </pc:grpChg>
+        <pc:grpChg chg="del mod">
+          <ac:chgData name="Kun Suo" userId="41c30799-3a2b-4880-86a3-8488be07954a" providerId="ADAL" clId="{01B90814-4EBE-5562-8795-CE1E7277191D}" dt="2026-05-29T19:37:36.635" v="144"/>
+          <ac:grpSpMkLst>
+            <pc:docMk/>
+            <pc:sldMk cId="0" sldId="267"/>
+            <ac:grpSpMk id="43" creationId="{5C786222-7E31-3C9C-9949-319681B6B2B0}"/>
+          </ac:grpSpMkLst>
+        </pc:grpChg>
+        <pc:grpChg chg="del mod">
+          <ac:chgData name="Kun Suo" userId="41c30799-3a2b-4880-86a3-8488be07954a" providerId="ADAL" clId="{01B90814-4EBE-5562-8795-CE1E7277191D}" dt="2026-05-29T19:37:50.836" v="152"/>
+          <ac:grpSpMkLst>
+            <pc:docMk/>
+            <pc:sldMk cId="0" sldId="267"/>
+            <ac:grpSpMk id="44" creationId="{453F29D7-C535-9BCE-7D0B-8C54F6504553}"/>
+          </ac:grpSpMkLst>
+        </pc:grpChg>
+        <pc:grpChg chg="del mod">
+          <ac:chgData name="Kun Suo" userId="41c30799-3a2b-4880-86a3-8488be07954a" providerId="ADAL" clId="{01B90814-4EBE-5562-8795-CE1E7277191D}" dt="2026-05-29T19:37:47.585" v="149"/>
+          <ac:grpSpMkLst>
+            <pc:docMk/>
+            <pc:sldMk cId="0" sldId="267"/>
+            <ac:grpSpMk id="49" creationId="{5B96D2C1-AF26-3106-81AB-6CDFB2201038}"/>
+          </ac:grpSpMkLst>
+        </pc:grpChg>
+        <pc:grpChg chg="del mod">
+          <ac:chgData name="Kun Suo" userId="41c30799-3a2b-4880-86a3-8488be07954a" providerId="ADAL" clId="{01B90814-4EBE-5562-8795-CE1E7277191D}" dt="2026-05-29T19:37:50.836" v="152"/>
+          <ac:grpSpMkLst>
+            <pc:docMk/>
+            <pc:sldMk cId="0" sldId="267"/>
+            <ac:grpSpMk id="50" creationId="{A241B713-FD55-C76F-3483-86B33857747A}"/>
+          </ac:grpSpMkLst>
+        </pc:grpChg>
+        <pc:grpChg chg="del mod">
+          <ac:chgData name="Kun Suo" userId="41c30799-3a2b-4880-86a3-8488be07954a" providerId="ADAL" clId="{01B90814-4EBE-5562-8795-CE1E7277191D}" dt="2026-05-29T19:37:50.836" v="152"/>
+          <ac:grpSpMkLst>
+            <pc:docMk/>
+            <pc:sldMk cId="0" sldId="267"/>
+            <ac:grpSpMk id="53" creationId="{BA38570B-1441-22D4-2336-FFD407768038}"/>
+          </ac:grpSpMkLst>
+        </pc:grpChg>
+        <pc:grpChg chg="del mod">
+          <ac:chgData name="Kun Suo" userId="41c30799-3a2b-4880-86a3-8488be07954a" providerId="ADAL" clId="{01B90814-4EBE-5562-8795-CE1E7277191D}" dt="2026-05-29T19:37:55.727" v="163"/>
+          <ac:grpSpMkLst>
+            <pc:docMk/>
+            <pc:sldMk cId="0" sldId="267"/>
+            <ac:grpSpMk id="54" creationId="{6849D803-2568-398F-8025-FFBF72B2DAE8}"/>
+          </ac:grpSpMkLst>
+        </pc:grpChg>
+        <pc:picChg chg="add mod">
+          <ac:chgData name="Kun Suo" userId="41c30799-3a2b-4880-86a3-8488be07954a" providerId="ADAL" clId="{01B90814-4EBE-5562-8795-CE1E7277191D}" dt="2026-05-29T19:26:13.455" v="100" actId="1076"/>
+          <ac:picMkLst>
+            <pc:docMk/>
+            <pc:sldMk cId="0" sldId="267"/>
+            <ac:picMk id="1026" creationId="{7628A778-188E-AEC1-F098-41CA81311B67}"/>
+          </ac:picMkLst>
+        </pc:picChg>
+        <pc:picChg chg="add mod">
+          <ac:chgData name="Kun Suo" userId="41c30799-3a2b-4880-86a3-8488be07954a" providerId="ADAL" clId="{01B90814-4EBE-5562-8795-CE1E7277191D}" dt="2026-05-29T19:26:37.632" v="104" actId="14100"/>
+          <ac:picMkLst>
+            <pc:docMk/>
+            <pc:sldMk cId="0" sldId="267"/>
+            <ac:picMk id="1028" creationId="{4F07ADB4-FC63-F659-54B5-4B45592B50B8}"/>
+          </ac:picMkLst>
+        </pc:picChg>
+        <pc:inkChg chg="add del mod">
+          <ac:chgData name="Kun Suo" userId="41c30799-3a2b-4880-86a3-8488be07954a" providerId="ADAL" clId="{01B90814-4EBE-5562-8795-CE1E7277191D}" dt="2026-05-29T19:37:55.726" v="159"/>
+          <ac:inkMkLst>
+            <pc:docMk/>
+            <pc:sldMk cId="0" sldId="267"/>
+            <ac:inkMk id="31" creationId="{016EAEF4-3F24-B79C-11B2-1D763E113D1D}"/>
+          </ac:inkMkLst>
+        </pc:inkChg>
+        <pc:inkChg chg="add del mod">
+          <ac:chgData name="Kun Suo" userId="41c30799-3a2b-4880-86a3-8488be07954a" providerId="ADAL" clId="{01B90814-4EBE-5562-8795-CE1E7277191D}" dt="2026-05-29T19:37:55.725" v="154"/>
+          <ac:inkMkLst>
+            <pc:docMk/>
+            <pc:sldMk cId="0" sldId="267"/>
+            <ac:inkMk id="32" creationId="{46107C30-6598-10A3-7018-C2316441A8EA}"/>
+          </ac:inkMkLst>
+        </pc:inkChg>
+        <pc:inkChg chg="add del mod">
+          <ac:chgData name="Kun Suo" userId="41c30799-3a2b-4880-86a3-8488be07954a" providerId="ADAL" clId="{01B90814-4EBE-5562-8795-CE1E7277191D}" dt="2026-05-29T19:37:55.725" v="156"/>
+          <ac:inkMkLst>
+            <pc:docMk/>
+            <pc:sldMk cId="0" sldId="267"/>
+            <ac:inkMk id="35" creationId="{77711FA3-F259-B4A8-011E-B2DAE4834BA6}"/>
+          </ac:inkMkLst>
+        </pc:inkChg>
+        <pc:inkChg chg="add del mod">
+          <ac:chgData name="Kun Suo" userId="41c30799-3a2b-4880-86a3-8488be07954a" providerId="ADAL" clId="{01B90814-4EBE-5562-8795-CE1E7277191D}" dt="2026-05-29T19:37:55.726" v="157"/>
+          <ac:inkMkLst>
+            <pc:docMk/>
+            <pc:sldMk cId="0" sldId="267"/>
+            <ac:inkMk id="36" creationId="{D733AA0E-826F-4F48-3A79-293778B48C6F}"/>
+          </ac:inkMkLst>
+        </pc:inkChg>
+        <pc:inkChg chg="add del mod">
+          <ac:chgData name="Kun Suo" userId="41c30799-3a2b-4880-86a3-8488be07954a" providerId="ADAL" clId="{01B90814-4EBE-5562-8795-CE1E7277191D}" dt="2026-05-29T19:37:55.726" v="160"/>
+          <ac:inkMkLst>
+            <pc:docMk/>
+            <pc:sldMk cId="0" sldId="267"/>
+            <ac:inkMk id="39" creationId="{AA3E4F8B-3895-F953-9365-E593711EA63F}"/>
+          </ac:inkMkLst>
+        </pc:inkChg>
+        <pc:inkChg chg="add del mod">
+          <ac:chgData name="Kun Suo" userId="41c30799-3a2b-4880-86a3-8488be07954a" providerId="ADAL" clId="{01B90814-4EBE-5562-8795-CE1E7277191D}" dt="2026-05-29T19:37:55.727" v="163"/>
+          <ac:inkMkLst>
+            <pc:docMk/>
+            <pc:sldMk cId="0" sldId="267"/>
+            <ac:inkMk id="42" creationId="{048490B7-5303-6BCE-A24D-2F11A9D88DF6}"/>
+          </ac:inkMkLst>
+        </pc:inkChg>
+        <pc:inkChg chg="add del mod">
+          <ac:chgData name="Kun Suo" userId="41c30799-3a2b-4880-86a3-8488be07954a" providerId="ADAL" clId="{01B90814-4EBE-5562-8795-CE1E7277191D}" dt="2026-05-29T19:37:55.725" v="155"/>
+          <ac:inkMkLst>
+            <pc:docMk/>
+            <pc:sldMk cId="0" sldId="267"/>
+            <ac:inkMk id="45" creationId="{A3770AA6-BAAA-371A-7DB1-33BFBF7549E9}"/>
+          </ac:inkMkLst>
+        </pc:inkChg>
+        <pc:inkChg chg="add del">
+          <ac:chgData name="Kun Suo" userId="41c30799-3a2b-4880-86a3-8488be07954a" providerId="ADAL" clId="{01B90814-4EBE-5562-8795-CE1E7277191D}" dt="2026-05-29T19:37:55.726" v="158"/>
+          <ac:inkMkLst>
+            <pc:docMk/>
+            <pc:sldMk cId="0" sldId="267"/>
+            <ac:inkMk id="46" creationId="{0FC6046F-6F73-55C0-BE04-ED8FD41F3552}"/>
+          </ac:inkMkLst>
+        </pc:inkChg>
+        <pc:inkChg chg="add del mod">
+          <ac:chgData name="Kun Suo" userId="41c30799-3a2b-4880-86a3-8488be07954a" providerId="ADAL" clId="{01B90814-4EBE-5562-8795-CE1E7277191D}" dt="2026-05-29T19:37:55.726" v="162"/>
+          <ac:inkMkLst>
+            <pc:docMk/>
+            <pc:sldMk cId="0" sldId="267"/>
+            <ac:inkMk id="47" creationId="{981DB219-0A90-8DCF-3282-579F8E56BBCD}"/>
+          </ac:inkMkLst>
+        </pc:inkChg>
+        <pc:inkChg chg="add del mod">
+          <ac:chgData name="Kun Suo" userId="41c30799-3a2b-4880-86a3-8488be07954a" providerId="ADAL" clId="{01B90814-4EBE-5562-8795-CE1E7277191D}" dt="2026-05-29T19:37:55.727" v="164"/>
+          <ac:inkMkLst>
+            <pc:docMk/>
+            <pc:sldMk cId="0" sldId="267"/>
+            <ac:inkMk id="48" creationId="{2CB59A30-9E3A-122F-5BD9-161C9E702671}"/>
+          </ac:inkMkLst>
+        </pc:inkChg>
+        <pc:inkChg chg="add del mod">
+          <ac:chgData name="Kun Suo" userId="41c30799-3a2b-4880-86a3-8488be07954a" providerId="ADAL" clId="{01B90814-4EBE-5562-8795-CE1E7277191D}" dt="2026-05-29T19:37:55.724" v="153"/>
+          <ac:inkMkLst>
+            <pc:docMk/>
+            <pc:sldMk cId="0" sldId="267"/>
+            <ac:inkMk id="51" creationId="{03D89556-D85E-A2C2-B087-24F55BA15ACB}"/>
+          </ac:inkMkLst>
+        </pc:inkChg>
+        <pc:inkChg chg="add del mod">
+          <ac:chgData name="Kun Suo" userId="41c30799-3a2b-4880-86a3-8488be07954a" providerId="ADAL" clId="{01B90814-4EBE-5562-8795-CE1E7277191D}" dt="2026-05-29T19:37:55.726" v="161"/>
+          <ac:inkMkLst>
+            <pc:docMk/>
+            <pc:sldMk cId="0" sldId="267"/>
+            <ac:inkMk id="52" creationId="{2A8FFFE1-A2C3-3742-4514-49057235BE07}"/>
+          </ac:inkMkLst>
+        </pc:inkChg>
+      </pc:sldChg>
+      <pc:sldChg chg="addSp delSp modSp mod">
+        <pc:chgData name="Kun Suo" userId="41c30799-3a2b-4880-86a3-8488be07954a" providerId="ADAL" clId="{01B90814-4EBE-5562-8795-CE1E7277191D}" dt="2026-05-29T19:40:52.913" v="204"/>
+        <pc:sldMkLst>
+          <pc:docMk/>
+          <pc:sldMk cId="0" sldId="268"/>
+        </pc:sldMkLst>
+        <pc:grpChg chg="del mod">
+          <ac:chgData name="Kun Suo" userId="41c30799-3a2b-4880-86a3-8488be07954a" providerId="ADAL" clId="{01B90814-4EBE-5562-8795-CE1E7277191D}" dt="2026-05-29T19:39:59.052" v="171"/>
+          <ac:grpSpMkLst>
+            <pc:docMk/>
+            <pc:sldMk cId="0" sldId="268"/>
+            <ac:grpSpMk id="36" creationId="{4CC3EBE6-61FC-6C25-9E02-1BBA97CA5C98}"/>
+          </ac:grpSpMkLst>
+        </pc:grpChg>
+        <pc:grpChg chg="del mod">
+          <ac:chgData name="Kun Suo" userId="41c30799-3a2b-4880-86a3-8488be07954a" providerId="ADAL" clId="{01B90814-4EBE-5562-8795-CE1E7277191D}" dt="2026-05-29T19:40:52.911" v="191"/>
+          <ac:grpSpMkLst>
+            <pc:docMk/>
+            <pc:sldMk cId="0" sldId="268"/>
+            <ac:grpSpMk id="37" creationId="{9631FD3F-0728-41E9-EEB2-E2413C54B110}"/>
+          </ac:grpSpMkLst>
+        </pc:grpChg>
+        <pc:grpChg chg="del mod">
+          <ac:chgData name="Kun Suo" userId="41c30799-3a2b-4880-86a3-8488be07954a" providerId="ADAL" clId="{01B90814-4EBE-5562-8795-CE1E7277191D}" dt="2026-05-29T19:40:18.588" v="177"/>
+          <ac:grpSpMkLst>
+            <pc:docMk/>
+            <pc:sldMk cId="0" sldId="268"/>
+            <ac:grpSpMk id="43" creationId="{D878E195-3751-6EF7-F29C-0625E43181CC}"/>
+          </ac:grpSpMkLst>
+        </pc:grpChg>
+        <pc:grpChg chg="del mod">
+          <ac:chgData name="Kun Suo" userId="41c30799-3a2b-4880-86a3-8488be07954a" providerId="ADAL" clId="{01B90814-4EBE-5562-8795-CE1E7277191D}" dt="2026-05-29T19:40:52.912" v="199"/>
+          <ac:grpSpMkLst>
+            <pc:docMk/>
+            <pc:sldMk cId="0" sldId="268"/>
+            <ac:grpSpMk id="44" creationId="{634AAB84-C003-5243-4B09-A524F76EB417}"/>
+          </ac:grpSpMkLst>
+        </pc:grpChg>
+        <pc:grpChg chg="del mod">
+          <ac:chgData name="Kun Suo" userId="41c30799-3a2b-4880-86a3-8488be07954a" providerId="ADAL" clId="{01B90814-4EBE-5562-8795-CE1E7277191D}" dt="2026-05-29T19:40:24.423" v="182"/>
+          <ac:grpSpMkLst>
+            <pc:docMk/>
+            <pc:sldMk cId="0" sldId="268"/>
+            <ac:grpSpMk id="49" creationId="{822D119A-93FB-C807-2BFA-4FCCCC87E54D}"/>
+          </ac:grpSpMkLst>
+        </pc:grpChg>
+        <pc:grpChg chg="del mod">
+          <ac:chgData name="Kun Suo" userId="41c30799-3a2b-4880-86a3-8488be07954a" providerId="ADAL" clId="{01B90814-4EBE-5562-8795-CE1E7277191D}" dt="2026-05-29T19:40:52.911" v="193"/>
+          <ac:grpSpMkLst>
+            <pc:docMk/>
+            <pc:sldMk cId="0" sldId="268"/>
+            <ac:grpSpMk id="50" creationId="{1B1C4976-D0D1-A913-0CA0-85D7FDC51D16}"/>
+          </ac:grpSpMkLst>
+        </pc:grpChg>
+        <pc:grpChg chg="del mod">
+          <ac:chgData name="Kun Suo" userId="41c30799-3a2b-4880-86a3-8488be07954a" providerId="ADAL" clId="{01B90814-4EBE-5562-8795-CE1E7277191D}" dt="2026-05-29T19:40:44.229" v="186"/>
+          <ac:grpSpMkLst>
+            <pc:docMk/>
+            <pc:sldMk cId="0" sldId="268"/>
+            <ac:grpSpMk id="54" creationId="{8E9E8B00-5B37-2A44-47C5-F0BDD65ED782}"/>
+          </ac:grpSpMkLst>
+        </pc:grpChg>
+        <pc:grpChg chg="del mod">
+          <ac:chgData name="Kun Suo" userId="41c30799-3a2b-4880-86a3-8488be07954a" providerId="ADAL" clId="{01B90814-4EBE-5562-8795-CE1E7277191D}" dt="2026-05-29T19:40:52.912" v="200"/>
+          <ac:grpSpMkLst>
+            <pc:docMk/>
+            <pc:sldMk cId="0" sldId="268"/>
+            <ac:grpSpMk id="55" creationId="{3D7AC6D9-D3FB-A605-1B6A-D3372C4A7B44}"/>
+          </ac:grpSpMkLst>
+        </pc:grpChg>
+        <pc:picChg chg="add mod">
+          <ac:chgData name="Kun Suo" userId="41c30799-3a2b-4880-86a3-8488be07954a" providerId="ADAL" clId="{01B90814-4EBE-5562-8795-CE1E7277191D}" dt="2026-05-29T19:39:49.242" v="167" actId="1076"/>
+          <ac:picMkLst>
+            <pc:docMk/>
+            <pc:sldMk cId="0" sldId="268"/>
+            <ac:picMk id="32" creationId="{59DD9767-210D-10D6-D19E-80DBB779D22B}"/>
+          </ac:picMkLst>
+        </pc:picChg>
+        <pc:inkChg chg="add del">
+          <ac:chgData name="Kun Suo" userId="41c30799-3a2b-4880-86a3-8488be07954a" providerId="ADAL" clId="{01B90814-4EBE-5562-8795-CE1E7277191D}" dt="2026-05-29T19:40:52.911" v="195"/>
+          <ac:inkMkLst>
+            <pc:docMk/>
+            <pc:sldMk cId="0" sldId="268"/>
+            <ac:inkMk id="31" creationId="{464E8120-78A8-B05C-A307-17CD4754AC10}"/>
+          </ac:inkMkLst>
+        </pc:inkChg>
+        <pc:inkChg chg="add del">
+          <ac:chgData name="Kun Suo" userId="41c30799-3a2b-4880-86a3-8488be07954a" providerId="ADAL" clId="{01B90814-4EBE-5562-8795-CE1E7277191D}" dt="2026-05-29T19:40:52.911" v="194"/>
+          <ac:inkMkLst>
+            <pc:docMk/>
+            <pc:sldMk cId="0" sldId="268"/>
+            <ac:inkMk id="33" creationId="{5BD5186C-EE76-E452-4B6B-41072C4D7595}"/>
+          </ac:inkMkLst>
+        </pc:inkChg>
+        <pc:inkChg chg="add del mod">
+          <ac:chgData name="Kun Suo" userId="41c30799-3a2b-4880-86a3-8488be07954a" providerId="ADAL" clId="{01B90814-4EBE-5562-8795-CE1E7277191D}" dt="2026-05-29T19:40:52.913" v="203"/>
+          <ac:inkMkLst>
+            <pc:docMk/>
+            <pc:sldMk cId="0" sldId="268"/>
+            <ac:inkMk id="34" creationId="{872F9DB9-4479-82EE-C791-BEB2899971D7}"/>
+          </ac:inkMkLst>
+        </pc:inkChg>
+        <pc:inkChg chg="add del mod">
+          <ac:chgData name="Kun Suo" userId="41c30799-3a2b-4880-86a3-8488be07954a" providerId="ADAL" clId="{01B90814-4EBE-5562-8795-CE1E7277191D}" dt="2026-05-29T19:40:52.911" v="191"/>
+          <ac:inkMkLst>
+            <pc:docMk/>
+            <pc:sldMk cId="0" sldId="268"/>
+            <ac:inkMk id="35" creationId="{4BC19C64-C057-6177-E6EE-DB42B478FC12}"/>
+          </ac:inkMkLst>
+        </pc:inkChg>
+        <pc:inkChg chg="add del">
+          <ac:chgData name="Kun Suo" userId="41c30799-3a2b-4880-86a3-8488be07954a" providerId="ADAL" clId="{01B90814-4EBE-5562-8795-CE1E7277191D}" dt="2026-05-29T19:40:52.911" v="192"/>
+          <ac:inkMkLst>
+            <pc:docMk/>
+            <pc:sldMk cId="0" sldId="268"/>
+            <ac:inkMk id="38" creationId="{72BA0140-0EE5-EE1F-8079-D0EF1863D25B}"/>
+          </ac:inkMkLst>
+        </pc:inkChg>
+        <pc:inkChg chg="add del mod">
+          <ac:chgData name="Kun Suo" userId="41c30799-3a2b-4880-86a3-8488be07954a" providerId="ADAL" clId="{01B90814-4EBE-5562-8795-CE1E7277191D}" dt="2026-05-29T19:40:52.912" v="199"/>
+          <ac:inkMkLst>
+            <pc:docMk/>
+            <pc:sldMk cId="0" sldId="268"/>
+            <ac:inkMk id="39" creationId="{9F11D552-A31B-200F-54E9-6CEEA416C341}"/>
+          </ac:inkMkLst>
+        </pc:inkChg>
+        <pc:inkChg chg="add del mod">
+          <ac:chgData name="Kun Suo" userId="41c30799-3a2b-4880-86a3-8488be07954a" providerId="ADAL" clId="{01B90814-4EBE-5562-8795-CE1E7277191D}" dt="2026-05-29T19:40:52.912" v="198"/>
+          <ac:inkMkLst>
+            <pc:docMk/>
+            <pc:sldMk cId="0" sldId="268"/>
+            <ac:inkMk id="40" creationId="{FD4E24DF-B5DF-E142-966C-257F337DBD98}"/>
+          </ac:inkMkLst>
+        </pc:inkChg>
+        <pc:inkChg chg="add del mod">
+          <ac:chgData name="Kun Suo" userId="41c30799-3a2b-4880-86a3-8488be07954a" providerId="ADAL" clId="{01B90814-4EBE-5562-8795-CE1E7277191D}" dt="2026-05-29T19:40:52.909" v="188"/>
+          <ac:inkMkLst>
+            <pc:docMk/>
+            <pc:sldMk cId="0" sldId="268"/>
+            <ac:inkMk id="41" creationId="{1F3DDD15-D816-E43C-9129-14A0F6F6EA31}"/>
+          </ac:inkMkLst>
+        </pc:inkChg>
+        <pc:inkChg chg="add del mod">
+          <ac:chgData name="Kun Suo" userId="41c30799-3a2b-4880-86a3-8488be07954a" providerId="ADAL" clId="{01B90814-4EBE-5562-8795-CE1E7277191D}" dt="2026-05-29T19:40:52.913" v="202"/>
+          <ac:inkMkLst>
+            <pc:docMk/>
+            <pc:sldMk cId="0" sldId="268"/>
+            <ac:inkMk id="42" creationId="{A68B4F59-0589-F528-6E3F-BFCB5BA7FE92}"/>
+          </ac:inkMkLst>
+        </pc:inkChg>
+        <pc:inkChg chg="add del mod">
+          <ac:chgData name="Kun Suo" userId="41c30799-3a2b-4880-86a3-8488be07954a" providerId="ADAL" clId="{01B90814-4EBE-5562-8795-CE1E7277191D}" dt="2026-05-29T19:40:52.911" v="193"/>
+          <ac:inkMkLst>
+            <pc:docMk/>
+            <pc:sldMk cId="0" sldId="268"/>
+            <ac:inkMk id="45" creationId="{1275F301-46BF-55E6-6B63-BA68C636D506}"/>
+          </ac:inkMkLst>
+        </pc:inkChg>
+        <pc:inkChg chg="add del mod">
+          <ac:chgData name="Kun Suo" userId="41c30799-3a2b-4880-86a3-8488be07954a" providerId="ADAL" clId="{01B90814-4EBE-5562-8795-CE1E7277191D}" dt="2026-05-29T19:40:52.913" v="204"/>
+          <ac:inkMkLst>
+            <pc:docMk/>
+            <pc:sldMk cId="0" sldId="268"/>
+            <ac:inkMk id="46" creationId="{E9B14B84-4FFC-50EC-49AA-78F9291A2073}"/>
+          </ac:inkMkLst>
+        </pc:inkChg>
+        <pc:inkChg chg="add del mod">
+          <ac:chgData name="Kun Suo" userId="41c30799-3a2b-4880-86a3-8488be07954a" providerId="ADAL" clId="{01B90814-4EBE-5562-8795-CE1E7277191D}" dt="2026-05-29T19:40:52.910" v="189"/>
+          <ac:inkMkLst>
+            <pc:docMk/>
+            <pc:sldMk cId="0" sldId="268"/>
+            <ac:inkMk id="47" creationId="{7200820C-4265-1E6E-D9F1-1D6816D80E02}"/>
+          </ac:inkMkLst>
+        </pc:inkChg>
+        <pc:inkChg chg="add del mod">
+          <ac:chgData name="Kun Suo" userId="41c30799-3a2b-4880-86a3-8488be07954a" providerId="ADAL" clId="{01B90814-4EBE-5562-8795-CE1E7277191D}" dt="2026-05-29T19:40:52.910" v="190"/>
+          <ac:inkMkLst>
+            <pc:docMk/>
+            <pc:sldMk cId="0" sldId="268"/>
+            <ac:inkMk id="48" creationId="{1C859063-EB0C-36D0-B27A-92E369BEC113}"/>
+          </ac:inkMkLst>
+        </pc:inkChg>
+        <pc:inkChg chg="add del">
+          <ac:chgData name="Kun Suo" userId="41c30799-3a2b-4880-86a3-8488be07954a" providerId="ADAL" clId="{01B90814-4EBE-5562-8795-CE1E7277191D}" dt="2026-05-29T19:40:52.912" v="197"/>
+          <ac:inkMkLst>
+            <pc:docMk/>
+            <pc:sldMk cId="0" sldId="268"/>
+            <ac:inkMk id="51" creationId="{5C9465DD-F24B-E468-23A8-3569AACC0130}"/>
+          </ac:inkMkLst>
+        </pc:inkChg>
+        <pc:inkChg chg="add del mod">
+          <ac:chgData name="Kun Suo" userId="41c30799-3a2b-4880-86a3-8488be07954a" providerId="ADAL" clId="{01B90814-4EBE-5562-8795-CE1E7277191D}" dt="2026-05-29T19:40:52.912" v="200"/>
+          <ac:inkMkLst>
+            <pc:docMk/>
+            <pc:sldMk cId="0" sldId="268"/>
+            <ac:inkMk id="52" creationId="{926BDB56-F1B6-69A6-58AD-48F6D45D1316}"/>
+          </ac:inkMkLst>
+        </pc:inkChg>
+        <pc:inkChg chg="add del mod">
+          <ac:chgData name="Kun Suo" userId="41c30799-3a2b-4880-86a3-8488be07954a" providerId="ADAL" clId="{01B90814-4EBE-5562-8795-CE1E7277191D}" dt="2026-05-29T19:40:52.913" v="201"/>
+          <ac:inkMkLst>
+            <pc:docMk/>
+            <pc:sldMk cId="0" sldId="268"/>
+            <ac:inkMk id="53" creationId="{C3201BC5-AC3F-2D23-3F58-0DD8569608D8}"/>
+          </ac:inkMkLst>
+        </pc:inkChg>
+        <pc:inkChg chg="add del">
+          <ac:chgData name="Kun Suo" userId="41c30799-3a2b-4880-86a3-8488be07954a" providerId="ADAL" clId="{01B90814-4EBE-5562-8795-CE1E7277191D}" dt="2026-05-29T19:40:52.912" v="196"/>
+          <ac:inkMkLst>
+            <pc:docMk/>
+            <pc:sldMk cId="0" sldId="268"/>
+            <ac:inkMk id="56" creationId="{8525A5DD-954E-704C-9C49-315BB476387F}"/>
+          </ac:inkMkLst>
+        </pc:inkChg>
+      </pc:sldChg>
+      <pc:sldChg chg="modSp mod">
+        <pc:chgData name="Kun Suo" userId="41c30799-3a2b-4880-86a3-8488be07954a" providerId="ADAL" clId="{01B90814-4EBE-5562-8795-CE1E7277191D}" dt="2026-05-29T19:43:15.551" v="205" actId="207"/>
+        <pc:sldMkLst>
+          <pc:docMk/>
+          <pc:sldMk cId="0" sldId="269"/>
+        </pc:sldMkLst>
+        <pc:spChg chg="mod">
+          <ac:chgData name="Kun Suo" userId="41c30799-3a2b-4880-86a3-8488be07954a" providerId="ADAL" clId="{01B90814-4EBE-5562-8795-CE1E7277191D}" dt="2026-05-29T19:43:15.551" v="205" actId="207"/>
+          <ac:spMkLst>
+            <pc:docMk/>
+            <pc:sldMk cId="0" sldId="269"/>
+            <ac:spMk id="5" creationId="{00000000-0000-0000-0000-000000000000}"/>
+          </ac:spMkLst>
+        </pc:spChg>
+      </pc:sldChg>
+      <pc:sldChg chg="modSp mod">
+        <pc:chgData name="Kun Suo" userId="41c30799-3a2b-4880-86a3-8488be07954a" providerId="ADAL" clId="{01B90814-4EBE-5562-8795-CE1E7277191D}" dt="2026-05-29T19:43:19.052" v="206" actId="207"/>
+        <pc:sldMkLst>
+          <pc:docMk/>
+          <pc:sldMk cId="0" sldId="270"/>
+        </pc:sldMkLst>
+        <pc:spChg chg="mod">
+          <ac:chgData name="Kun Suo" userId="41c30799-3a2b-4880-86a3-8488be07954a" providerId="ADAL" clId="{01B90814-4EBE-5562-8795-CE1E7277191D}" dt="2026-05-29T19:43:19.052" v="206" actId="207"/>
+          <ac:spMkLst>
+            <pc:docMk/>
+            <pc:sldMk cId="0" sldId="270"/>
+            <ac:spMk id="5" creationId="{00000000-0000-0000-0000-000000000000}"/>
+          </ac:spMkLst>
+        </pc:spChg>
+      </pc:sldChg>
+    </pc:docChg>
+  </pc:docChgLst>
+</pc:chgInfo>
 </file>
 
 <file path=ppt/slideLayouts/slideLayout1.xml><?xml version="1.0" encoding="utf-8"?>
@@ -4219,45 +5128,18 @@
               </a:spcBef>
             </a:pPr>
             <a:r>
-              <a:rPr dirty="0">
+              <a:rPr lang="en-US">
                 <a:solidFill>
                   <a:srgbClr val="B30000"/>
                 </a:solidFill>
               </a:rPr>
-              <a:t>-</a:t>
-            </a:r>
-            <a:r>
-              <a:rPr spc="-60" dirty="0">
-                <a:solidFill>
-                  <a:srgbClr val="B30000"/>
-                </a:solidFill>
-              </a:rPr>
-              <a:t> </a:t>
-            </a:r>
-            <a:r>
-              <a:rPr spc="-10" dirty="0">
-                <a:solidFill>
-                  <a:srgbClr val="B30000"/>
-                </a:solidFill>
-              </a:rPr>
-              <a:t>Notes</a:t>
-            </a:r>
-            <a:r>
-              <a:rPr spc="-55" dirty="0">
-                <a:solidFill>
-                  <a:srgbClr val="B30000"/>
-                </a:solidFill>
-              </a:rPr>
-              <a:t> </a:t>
-            </a:r>
-            <a:r>
-              <a:rPr spc="-50" dirty="0">
-                <a:solidFill>
-                  <a:srgbClr val="B30000"/>
-                </a:solidFill>
-              </a:rPr>
-              <a:t>3</a:t>
-            </a:r>
+              <a:t>Counting</a:t>
+            </a:r>
+            <a:endParaRPr spc="-50" dirty="0">
+              <a:solidFill>
+                <a:srgbClr val="B30000"/>
+              </a:solidFill>
+            </a:endParaRPr>
           </a:p>
         </p:txBody>
       </p:sp>
@@ -6692,7 +7574,7 @@
               </a:rPr>
               <a:t>110.</a:t>
             </a:r>
-            <a:endParaRPr sz="1100">
+            <a:endParaRPr sz="1100" dirty="0">
               <a:latin typeface="Tahoma"/>
               <a:cs typeface="Tahoma"/>
             </a:endParaRPr>
@@ -6735,7 +7617,7 @@
               </a:rPr>
               <a:t>2</a:t>
             </a:r>
-            <a:endParaRPr sz="800">
+            <a:endParaRPr sz="800" dirty="0">
               <a:latin typeface="Tahoma"/>
               <a:cs typeface="Tahoma"/>
             </a:endParaRPr>
@@ -6917,7 +7799,7 @@
               </a:rPr>
               <a:t>32.</a:t>
             </a:r>
-            <a:endParaRPr sz="1100">
+            <a:endParaRPr sz="1100" dirty="0">
               <a:latin typeface="Tahoma"/>
               <a:cs typeface="Tahoma"/>
             </a:endParaRPr>
@@ -7001,7 +7883,14 @@
               </a:rPr>
               <a:t>3?</a:t>
             </a:r>
-            <a:endParaRPr sz="1100">
+            <a:r>
+              <a:rPr lang="en-US" sz="1100" spc="-25" dirty="0">
+                <a:latin typeface="Tahoma"/>
+                <a:cs typeface="Tahoma"/>
+              </a:rPr>
+              <a:t> Answer is 10</a:t>
+            </a:r>
+            <a:endParaRPr sz="1100" dirty="0">
               <a:latin typeface="Tahoma"/>
               <a:cs typeface="Tahoma"/>
             </a:endParaRPr>
@@ -7219,7 +8108,7 @@
               </a:rPr>
               <a:t>|</a:t>
             </a:r>
-            <a:endParaRPr sz="1100">
+            <a:endParaRPr sz="1100" dirty="0">
               <a:latin typeface="Lucida Sans Unicode"/>
               <a:cs typeface="Lucida Sans Unicode"/>
             </a:endParaRPr>
@@ -7269,7 +8158,7 @@
               </a:rPr>
               <a:t>3</a:t>
             </a:r>
-            <a:endParaRPr sz="800">
+            <a:endParaRPr sz="800" dirty="0">
               <a:latin typeface="Tahoma"/>
               <a:cs typeface="Tahoma"/>
             </a:endParaRPr>
@@ -7556,7 +8445,7 @@
               </a:rPr>
               <a:t>|</a:t>
             </a:r>
-            <a:endParaRPr sz="1100">
+            <a:endParaRPr sz="1100" dirty="0">
               <a:latin typeface="Lucida Sans Unicode"/>
               <a:cs typeface="Lucida Sans Unicode"/>
             </a:endParaRPr>
@@ -7651,7 +8540,7 @@
               </a:rPr>
               <a:t>3</a:t>
             </a:r>
-            <a:endParaRPr sz="800">
+            <a:endParaRPr sz="800" dirty="0">
               <a:latin typeface="Tahoma"/>
               <a:cs typeface="Tahoma"/>
             </a:endParaRPr>
@@ -8092,7 +8981,7 @@
               </a:rPr>
               <a:t>3.</a:t>
             </a:r>
-            <a:endParaRPr sz="1100">
+            <a:endParaRPr sz="1100" dirty="0">
               <a:latin typeface="Tahoma"/>
               <a:cs typeface="Tahoma"/>
             </a:endParaRPr>
@@ -8121,6 +9010,37 @@
           <a:xfrm>
             <a:off x="281089" y="2794787"/>
             <a:ext cx="65265" cy="65265"/>
+          </a:xfrm>
+          <a:prstGeom prst="rect">
+            <a:avLst/>
+          </a:prstGeom>
+        </p:spPr>
+      </p:pic>
+      <p:pic>
+        <p:nvPicPr>
+          <p:cNvPr id="18" name="Picture 17">
+            <a:extLst>
+              <a:ext uri="{FF2B5EF4-FFF2-40B4-BE49-F238E27FC236}">
+                <a16:creationId xmlns:a16="http://schemas.microsoft.com/office/drawing/2014/main" id="{39491A1D-F489-7D62-9DDD-2BF42DB3230A}"/>
+              </a:ext>
+            </a:extLst>
+          </p:cNvPr>
+          <p:cNvPicPr>
+            <a:picLocks noChangeAspect="1"/>
+          </p:cNvPicPr>
+          <p:nvPr/>
+        </p:nvPicPr>
+        <p:blipFill>
+          <a:blip r:embed="rId10"/>
+          <a:srcRect r="37162"/>
+          <a:stretch>
+            <a:fillRect/>
+          </a:stretch>
+        </p:blipFill>
+        <p:spPr>
+          <a:xfrm>
+            <a:off x="3802303" y="567896"/>
+            <a:ext cx="526708" cy="569148"/>
           </a:xfrm>
           <a:prstGeom prst="rect">
             <a:avLst/>
@@ -8263,7 +9183,7 @@
         </p:nvSpPr>
         <p:spPr>
           <a:xfrm>
-            <a:off x="125844" y="785925"/>
+            <a:off x="139775" y="485965"/>
             <a:ext cx="3089275" cy="191770"/>
           </a:xfrm>
           <a:prstGeom prst="rect">
@@ -8488,7 +9408,7 @@
         </p:nvSpPr>
         <p:spPr>
           <a:xfrm>
-            <a:off x="2254275" y="1077809"/>
+            <a:off x="2268206" y="777849"/>
             <a:ext cx="97155" cy="191770"/>
           </a:xfrm>
           <a:prstGeom prst="rect">
@@ -8531,7 +9451,7 @@
         </p:nvSpPr>
         <p:spPr>
           <a:xfrm>
-            <a:off x="2251659" y="1266569"/>
+            <a:off x="2265590" y="966609"/>
             <a:ext cx="93345" cy="191770"/>
           </a:xfrm>
           <a:prstGeom prst="rect">
@@ -8580,7 +9500,7 @@
         </p:nvSpPr>
         <p:spPr>
           <a:xfrm>
-            <a:off x="2149678" y="976184"/>
+            <a:off x="2163609" y="676224"/>
             <a:ext cx="309245" cy="191770"/>
           </a:xfrm>
           <a:prstGeom prst="rect">
@@ -8635,7 +9555,7 @@
         </p:blipFill>
         <p:spPr>
           <a:xfrm>
-            <a:off x="281089" y="1713141"/>
+            <a:off x="295020" y="1413181"/>
             <a:ext cx="65265" cy="65265"/>
           </a:xfrm>
           <a:prstGeom prst="rect">
@@ -8651,7 +9571,7 @@
         </p:nvSpPr>
         <p:spPr>
           <a:xfrm>
-            <a:off x="468287" y="1605545"/>
+            <a:off x="482218" y="1305585"/>
             <a:ext cx="81280" cy="147320"/>
           </a:xfrm>
           <a:prstGeom prst="rect">
@@ -8694,7 +9614,7 @@
         </p:nvSpPr>
         <p:spPr>
           <a:xfrm>
-            <a:off x="466432" y="1714791"/>
+            <a:off x="480363" y="1414831"/>
             <a:ext cx="78105" cy="147320"/>
           </a:xfrm>
           <a:prstGeom prst="rect">
@@ -8743,7 +9663,7 @@
         </p:nvSpPr>
         <p:spPr>
           <a:xfrm>
-            <a:off x="402932" y="1517470"/>
+            <a:off x="416863" y="1217510"/>
             <a:ext cx="213360" cy="191770"/>
           </a:xfrm>
           <a:prstGeom prst="rect">
@@ -8786,7 +9706,7 @@
         </p:nvSpPr>
         <p:spPr>
           <a:xfrm>
-            <a:off x="915657" y="1616734"/>
+            <a:off x="929588" y="1316774"/>
             <a:ext cx="81280" cy="147320"/>
           </a:xfrm>
           <a:prstGeom prst="rect">
@@ -8829,7 +9749,7 @@
         </p:nvSpPr>
         <p:spPr>
           <a:xfrm>
-            <a:off x="915657" y="1709203"/>
+            <a:off x="929588" y="1409243"/>
             <a:ext cx="78105" cy="147320"/>
           </a:xfrm>
           <a:prstGeom prst="rect">
@@ -8872,7 +9792,7 @@
         </p:nvSpPr>
         <p:spPr>
           <a:xfrm>
-            <a:off x="629335" y="1629688"/>
+            <a:off x="643266" y="1329728"/>
             <a:ext cx="2766060" cy="191770"/>
           </a:xfrm>
           <a:prstGeom prst="rect">
@@ -9081,7 +10001,7 @@
         </p:blipFill>
         <p:spPr>
           <a:xfrm>
-            <a:off x="281089" y="1999094"/>
+            <a:off x="295020" y="1699134"/>
             <a:ext cx="65265" cy="65265"/>
           </a:xfrm>
           <a:prstGeom prst="rect">
@@ -9097,7 +10017,7 @@
         </p:nvSpPr>
         <p:spPr>
           <a:xfrm>
-            <a:off x="468287" y="1891486"/>
+            <a:off x="482218" y="1591526"/>
             <a:ext cx="81280" cy="147320"/>
           </a:xfrm>
           <a:prstGeom prst="rect">
@@ -9140,7 +10060,7 @@
         </p:nvSpPr>
         <p:spPr>
           <a:xfrm>
-            <a:off x="466432" y="2000744"/>
+            <a:off x="480363" y="1700784"/>
             <a:ext cx="78105" cy="147320"/>
           </a:xfrm>
           <a:prstGeom prst="rect">
@@ -9189,7 +10109,7 @@
         </p:nvSpPr>
         <p:spPr>
           <a:xfrm>
-            <a:off x="402932" y="1803411"/>
+            <a:off x="416863" y="1503451"/>
             <a:ext cx="213360" cy="191770"/>
           </a:xfrm>
           <a:prstGeom prst="rect">
@@ -9232,7 +10152,7 @@
         </p:nvSpPr>
         <p:spPr>
           <a:xfrm>
-            <a:off x="637031" y="1915641"/>
+            <a:off x="650962" y="1615681"/>
             <a:ext cx="3810635" cy="191770"/>
           </a:xfrm>
           <a:prstGeom prst="rect">
@@ -9469,7 +10389,7 @@
         </p:blipFill>
         <p:spPr>
           <a:xfrm>
-            <a:off x="281089" y="2285034"/>
+            <a:off x="295020" y="1985074"/>
             <a:ext cx="65265" cy="65265"/>
           </a:xfrm>
           <a:prstGeom prst="rect">
@@ -9485,7 +10405,7 @@
         </p:nvSpPr>
         <p:spPr>
           <a:xfrm>
-            <a:off x="468287" y="2177439"/>
+            <a:off x="482218" y="1877479"/>
             <a:ext cx="81280" cy="147320"/>
           </a:xfrm>
           <a:prstGeom prst="rect">
@@ -9528,7 +10448,7 @@
         </p:nvSpPr>
         <p:spPr>
           <a:xfrm>
-            <a:off x="466432" y="2286684"/>
+            <a:off x="480363" y="1986724"/>
             <a:ext cx="78105" cy="147320"/>
           </a:xfrm>
           <a:prstGeom prst="rect">
@@ -9577,7 +10497,7 @@
         </p:nvSpPr>
         <p:spPr>
           <a:xfrm>
-            <a:off x="402932" y="2089364"/>
+            <a:off x="416863" y="1789404"/>
             <a:ext cx="213360" cy="191770"/>
           </a:xfrm>
           <a:prstGeom prst="rect">
@@ -9620,7 +10540,7 @@
         </p:nvSpPr>
         <p:spPr>
           <a:xfrm>
-            <a:off x="637031" y="2201581"/>
+            <a:off x="650962" y="1901621"/>
             <a:ext cx="3076575" cy="191770"/>
           </a:xfrm>
           <a:prstGeom prst="rect">
@@ -9834,7 +10754,7 @@
         </p:nvSpPr>
         <p:spPr>
           <a:xfrm>
-            <a:off x="1708454" y="2188640"/>
+            <a:off x="1722385" y="1888680"/>
             <a:ext cx="2060575" cy="147320"/>
           </a:xfrm>
           <a:prstGeom prst="rect">
@@ -9907,7 +10827,7 @@
               </a:rPr>
               <a:t>n</a:t>
             </a:r>
-            <a:endParaRPr sz="800">
+            <a:endParaRPr sz="800" dirty="0">
               <a:latin typeface="Constantia"/>
               <a:cs typeface="Constantia"/>
             </a:endParaRPr>
@@ -9934,7 +10854,7 @@
         </p:blipFill>
         <p:spPr>
           <a:xfrm>
-            <a:off x="281089" y="2570988"/>
+            <a:off x="295020" y="2271028"/>
             <a:ext cx="65265" cy="65265"/>
           </a:xfrm>
           <a:prstGeom prst="rect">
@@ -9950,7 +10870,7 @@
         </p:nvSpPr>
         <p:spPr>
           <a:xfrm>
-            <a:off x="468287" y="2463379"/>
+            <a:off x="482218" y="2163419"/>
             <a:ext cx="81280" cy="147320"/>
           </a:xfrm>
           <a:prstGeom prst="rect">
@@ -9993,7 +10913,7 @@
         </p:nvSpPr>
         <p:spPr>
           <a:xfrm>
-            <a:off x="466432" y="2572637"/>
+            <a:off x="480363" y="2272677"/>
             <a:ext cx="78105" cy="147320"/>
           </a:xfrm>
           <a:prstGeom prst="rect">
@@ -10042,7 +10962,7 @@
         </p:nvSpPr>
         <p:spPr>
           <a:xfrm>
-            <a:off x="402932" y="2375317"/>
+            <a:off x="416863" y="2075357"/>
             <a:ext cx="213360" cy="191770"/>
           </a:xfrm>
           <a:prstGeom prst="rect">
@@ -10085,7 +11005,7 @@
         </p:nvSpPr>
         <p:spPr>
           <a:xfrm>
-            <a:off x="634771" y="2487535"/>
+            <a:off x="648702" y="2187575"/>
             <a:ext cx="3847465" cy="191770"/>
           </a:xfrm>
           <a:prstGeom prst="rect">
@@ -10309,6 +11229,100 @@
           </a:p>
         </p:txBody>
       </p:sp>
+      <p:pic>
+        <p:nvPicPr>
+          <p:cNvPr id="1026" name="Picture 2" descr="Exponents">
+            <a:extLst>
+              <a:ext uri="{FF2B5EF4-FFF2-40B4-BE49-F238E27FC236}">
+                <a16:creationId xmlns:a16="http://schemas.microsoft.com/office/drawing/2014/main" id="{7628A778-188E-AEC1-F098-41CA81311B67}"/>
+              </a:ext>
+            </a:extLst>
+          </p:cNvPr>
+          <p:cNvPicPr>
+            <a:picLocks noChangeAspect="1" noChangeArrowheads="1"/>
+          </p:cNvPicPr>
+          <p:nvPr/>
+        </p:nvPicPr>
+        <p:blipFill>
+          <a:blip r:embed="rId6">
+            <a:extLst>
+              <a:ext uri="{28A0092B-C50C-407E-A947-70E740481C1C}">
+                <a14:useLocalDpi xmlns:a14="http://schemas.microsoft.com/office/drawing/2010/main" val="0"/>
+              </a:ext>
+            </a:extLst>
+          </a:blip>
+          <a:srcRect/>
+          <a:stretch>
+            <a:fillRect/>
+          </a:stretch>
+        </p:blipFill>
+        <p:spPr bwMode="auto">
+          <a:xfrm>
+            <a:off x="295020" y="2556982"/>
+            <a:ext cx="1846593" cy="591368"/>
+          </a:xfrm>
+          <a:prstGeom prst="rect">
+            <a:avLst/>
+          </a:prstGeom>
+          <a:noFill/>
+          <a:extLst>
+            <a:ext uri="{909E8E84-426E-40DD-AFC4-6F175D3DCCD1}">
+              <a14:hiddenFill xmlns:a14="http://schemas.microsoft.com/office/drawing/2010/main">
+                <a:solidFill>
+                  <a:srgbClr val="FFFFFF"/>
+                </a:solidFill>
+              </a14:hiddenFill>
+            </a:ext>
+          </a:extLst>
+        </p:spPr>
+      </p:pic>
+      <p:pic>
+        <p:nvPicPr>
+          <p:cNvPr id="1028" name="Picture 4" descr="The Binomial Theorem Explained. with a special splash of Pascal's… | by  Brett Berry | Math Hacks | Medium">
+            <a:extLst>
+              <a:ext uri="{FF2B5EF4-FFF2-40B4-BE49-F238E27FC236}">
+                <a16:creationId xmlns:a16="http://schemas.microsoft.com/office/drawing/2014/main" id="{4F07ADB4-FC63-F659-54B5-4B45592B50B8}"/>
+              </a:ext>
+            </a:extLst>
+          </p:cNvPr>
+          <p:cNvPicPr>
+            <a:picLocks noChangeAspect="1" noChangeArrowheads="1"/>
+          </p:cNvPicPr>
+          <p:nvPr/>
+        </p:nvPicPr>
+        <p:blipFill>
+          <a:blip r:embed="rId7">
+            <a:extLst>
+              <a:ext uri="{28A0092B-C50C-407E-A947-70E740481C1C}">
+                <a14:useLocalDpi xmlns:a14="http://schemas.microsoft.com/office/drawing/2010/main" val="0"/>
+              </a:ext>
+            </a:extLst>
+          </a:blip>
+          <a:srcRect/>
+          <a:stretch>
+            <a:fillRect/>
+          </a:stretch>
+        </p:blipFill>
+        <p:spPr bwMode="auto">
+          <a:xfrm>
+            <a:off x="2369020" y="2462998"/>
+            <a:ext cx="2128253" cy="895567"/>
+          </a:xfrm>
+          <a:prstGeom prst="rect">
+            <a:avLst/>
+          </a:prstGeom>
+          <a:noFill/>
+          <a:extLst>
+            <a:ext uri="{909E8E84-426E-40DD-AFC4-6F175D3DCCD1}">
+              <a14:hiddenFill xmlns:a14="http://schemas.microsoft.com/office/drawing/2010/main">
+                <a:solidFill>
+                  <a:srgbClr val="FFFFFF"/>
+                </a:solidFill>
+              </a14:hiddenFill>
+            </a:ext>
+          </a:extLst>
+        </p:spPr>
+      </p:pic>
     </p:spTree>
   </p:cSld>
   <p:clrMapOvr>
@@ -12258,6 +13272,37 @@
           </a:p>
         </p:txBody>
       </p:sp>
+      <p:pic>
+        <p:nvPicPr>
+          <p:cNvPr id="32" name="Picture 31">
+            <a:extLst>
+              <a:ext uri="{FF2B5EF4-FFF2-40B4-BE49-F238E27FC236}">
+                <a16:creationId xmlns:a16="http://schemas.microsoft.com/office/drawing/2014/main" id="{59DD9767-210D-10D6-D19E-80DBB779D22B}"/>
+              </a:ext>
+            </a:extLst>
+          </p:cNvPr>
+          <p:cNvPicPr>
+            <a:picLocks noChangeAspect="1"/>
+          </p:cNvPicPr>
+          <p:nvPr/>
+        </p:nvPicPr>
+        <p:blipFill>
+          <a:blip r:embed="rId5"/>
+          <a:srcRect r="37162"/>
+          <a:stretch>
+            <a:fillRect/>
+          </a:stretch>
+        </p:blipFill>
+        <p:spPr>
+          <a:xfrm>
+            <a:off x="3823213" y="2022246"/>
+            <a:ext cx="526708" cy="569148"/>
+          </a:xfrm>
+          <a:prstGeom prst="rect">
+            <a:avLst/>
+          </a:prstGeom>
+        </p:spPr>
+      </p:pic>
     </p:spTree>
   </p:cSld>
   <p:clrMapOvr>
@@ -12500,6 +13545,9 @@
             </a:r>
             <a:r>
               <a:rPr sz="1100" b="1" spc="-50" dirty="0">
+                <a:solidFill>
+                  <a:schemeClr val="accent2"/>
+                </a:solidFill>
                 <a:latin typeface="Arial"/>
                 <a:cs typeface="Arial"/>
               </a:rPr>
@@ -14721,6 +15769,9 @@
             </a:r>
             <a:r>
               <a:rPr sz="1100" b="1" spc="-50" dirty="0">
+                <a:solidFill>
+                  <a:schemeClr val="accent2"/>
+                </a:solidFill>
                 <a:latin typeface="Arial"/>
                 <a:cs typeface="Arial"/>
               </a:rPr>
@@ -14768,7 +15819,7 @@
               </a:rPr>
               <a:t>objects.</a:t>
             </a:r>
-            <a:endParaRPr sz="1100">
+            <a:endParaRPr sz="1100" dirty="0">
               <a:latin typeface="Tahoma"/>
               <a:cs typeface="Tahoma"/>
             </a:endParaRPr>
@@ -15055,7 +16106,7 @@
               </a:rPr>
               <a:t>)</a:t>
             </a:r>
-            <a:endParaRPr sz="1100">
+            <a:endParaRPr sz="1100" dirty="0">
               <a:latin typeface="Tahoma"/>
               <a:cs typeface="Tahoma"/>
             </a:endParaRPr>
@@ -24084,11 +25135,11 @@
               <a:t> </a:t>
             </a:r>
             <a:r>
-              <a:rPr sz="1100" spc="-70" dirty="0">
-                <a:latin typeface="Tahoma"/>
-                <a:cs typeface="Tahoma"/>
-              </a:rPr>
-              <a:t>seven</a:t>
+              <a:rPr lang="en-US" sz="1100" spc="-70" dirty="0">
+                <a:latin typeface="Tahoma"/>
+                <a:cs typeface="Tahoma"/>
+              </a:rPr>
+              <a:t>7</a:t>
             </a:r>
             <a:r>
               <a:rPr sz="1100" spc="-15" dirty="0">
@@ -24161,11 +25212,11 @@
               <a:t> </a:t>
             </a:r>
             <a:r>
-              <a:rPr sz="1100" spc="-35" dirty="0">
-                <a:latin typeface="Tahoma"/>
-                <a:cs typeface="Tahoma"/>
-              </a:rPr>
-              <a:t>nine</a:t>
+              <a:rPr lang="en-US" sz="1100" spc="-35" dirty="0">
+                <a:latin typeface="Tahoma"/>
+                <a:cs typeface="Tahoma"/>
+              </a:rPr>
+              <a:t>9</a:t>
             </a:r>
             <a:r>
               <a:rPr sz="1100" spc="-15" dirty="0">
@@ -24623,18 +25674,18 @@
               <a:t> </a:t>
             </a:r>
             <a:r>
-              <a:rPr sz="1100" spc="-400" dirty="0">
+              <a:rPr lang="en-US" sz="1100" spc="-400" dirty="0">
                 <a:latin typeface="Lucida Sans Unicode"/>
                 <a:cs typeface="Lucida Sans Unicode"/>
               </a:rPr>
-              <a:t>·</a:t>
-            </a:r>
-            <a:r>
-              <a:rPr sz="1100" spc="-105" dirty="0">
+              <a:t>x </a:t>
+            </a:r>
+            <a:r>
+              <a:rPr lang="en-US" sz="1100" spc="-105" dirty="0">
                 <a:latin typeface="Lucida Sans Unicode"/>
                 <a:cs typeface="Lucida Sans Unicode"/>
               </a:rPr>
-              <a:t> </a:t>
+              <a:t>  </a:t>
             </a:r>
             <a:r>
               <a:rPr sz="1100" spc="-35" dirty="0">
@@ -25699,7 +26750,7 @@
               </a:rPr>
               <a:t>Sets</a:t>
             </a:r>
-            <a:endParaRPr sz="1200">
+            <a:endParaRPr sz="1200" dirty="0">
               <a:latin typeface="Tahoma"/>
               <a:cs typeface="Tahoma"/>
             </a:endParaRPr>
@@ -26070,7 +27121,7 @@
               </a:rPr>
               <a:t>happen.</a:t>
             </a:r>
-            <a:endParaRPr sz="1100">
+            <a:endParaRPr sz="1100" dirty="0">
               <a:latin typeface="Tahoma"/>
               <a:cs typeface="Tahoma"/>
             </a:endParaRPr>
@@ -26084,7 +27135,7 @@
                 <a:spcPts val="735"/>
               </a:spcBef>
             </a:pPr>
-            <a:endParaRPr sz="1100">
+            <a:endParaRPr sz="1100" dirty="0">
               <a:latin typeface="Tahoma"/>
               <a:cs typeface="Tahoma"/>
             </a:endParaRPr>
@@ -26165,7 +27216,7 @@
               </a:rPr>
               <a:t>Sets</a:t>
             </a:r>
-            <a:endParaRPr sz="1200">
+            <a:endParaRPr sz="1200" dirty="0">
               <a:latin typeface="Tahoma"/>
               <a:cs typeface="Tahoma"/>
             </a:endParaRPr>
@@ -26515,7 +27566,7 @@
               </a:rPr>
               <a:t>then</a:t>
             </a:r>
-            <a:endParaRPr sz="1100">
+            <a:endParaRPr sz="1100" dirty="0">
               <a:latin typeface="Tahoma"/>
               <a:cs typeface="Tahoma"/>
             </a:endParaRPr>
@@ -26529,7 +27580,7 @@
                 <a:spcPts val="60"/>
               </a:spcBef>
             </a:pPr>
-            <a:endParaRPr sz="1100">
+            <a:endParaRPr sz="1100" dirty="0">
               <a:latin typeface="Tahoma"/>
               <a:cs typeface="Tahoma"/>
             </a:endParaRPr>
@@ -26673,7 +27724,7 @@
               </a:rPr>
               <a:t>|</a:t>
             </a:r>
-            <a:endParaRPr sz="1100">
+            <a:endParaRPr sz="1100" dirty="0">
               <a:latin typeface="Lucida Sans Unicode"/>
               <a:cs typeface="Lucida Sans Unicode"/>
             </a:endParaRPr>
@@ -27007,7 +28058,7 @@
               </a:rPr>
               <a:t> by:</a:t>
             </a:r>
-            <a:endParaRPr sz="1100">
+            <a:endParaRPr sz="1100" dirty="0">
               <a:latin typeface="Tahoma"/>
               <a:cs typeface="Tahoma"/>
             </a:endParaRPr>
@@ -27021,7 +28072,7 @@
                 <a:spcPts val="60"/>
               </a:spcBef>
             </a:pPr>
-            <a:endParaRPr sz="1100">
+            <a:endParaRPr sz="1100" dirty="0">
               <a:latin typeface="Tahoma"/>
               <a:cs typeface="Tahoma"/>
             </a:endParaRPr>
@@ -27256,7 +28307,7 @@
               </a:rPr>
               <a:t>}</a:t>
             </a:r>
-            <a:endParaRPr sz="1100">
+            <a:endParaRPr sz="1100" dirty="0">
               <a:latin typeface="Lucida Sans Unicode"/>
               <a:cs typeface="Lucida Sans Unicode"/>
             </a:endParaRPr>
@@ -27529,7 +28580,7 @@
               </a:rPr>
               <a:t>A</a:t>
             </a:r>
-            <a:endParaRPr sz="1100">
+            <a:endParaRPr sz="1100" dirty="0">
               <a:latin typeface="Trebuchet MS"/>
               <a:cs typeface="Trebuchet MS"/>
             </a:endParaRPr>
@@ -27687,7 +28738,7 @@
               </a:rPr>
               <a:t>product:</a:t>
             </a:r>
-            <a:endParaRPr sz="1100">
+            <a:endParaRPr sz="1100" dirty="0">
               <a:latin typeface="Tahoma"/>
               <a:cs typeface="Tahoma"/>
             </a:endParaRPr>
@@ -28100,7 +29151,7 @@
               </a:rPr>
               <a:t>}</a:t>
             </a:r>
-            <a:endParaRPr sz="1100">
+            <a:endParaRPr sz="1100" dirty="0">
               <a:latin typeface="Lucida Sans Unicode"/>
               <a:cs typeface="Lucida Sans Unicode"/>
             </a:endParaRPr>
@@ -28346,7 +29397,7 @@
                         </a:rPr>
                         <a:t>{</a:t>
                       </a:r>
-                      <a:endParaRPr sz="1100">
+                      <a:endParaRPr sz="1100" dirty="0">
                         <a:latin typeface="Lucida Sans Unicode"/>
                         <a:cs typeface="Lucida Sans Unicode"/>
                       </a:endParaRPr>
@@ -29889,7 +30940,7 @@
                         </a:rPr>
                         <a:t>)</a:t>
                       </a:r>
-                      <a:endParaRPr sz="1100">
+                      <a:endParaRPr sz="1100" dirty="0">
                         <a:latin typeface="Tahoma"/>
                         <a:cs typeface="Tahoma"/>
                       </a:endParaRPr>
@@ -29916,7 +30967,7 @@
         <p:spPr>
           <a:xfrm>
             <a:off x="125844" y="1827858"/>
-            <a:ext cx="3216910" cy="682625"/>
+            <a:ext cx="4160406" cy="673261"/>
           </a:xfrm>
           <a:prstGeom prst="rect">
             <a:avLst/>
@@ -29943,7 +30994,7 @@
               </a:rPr>
               <a:t>.</a:t>
             </a:r>
-            <a:endParaRPr sz="1100">
+            <a:endParaRPr sz="1100" dirty="0">
               <a:latin typeface="Tahoma"/>
               <a:cs typeface="Tahoma"/>
             </a:endParaRPr>
@@ -29957,7 +31008,7 @@
                 <a:spcPts val="1215"/>
               </a:spcBef>
             </a:pPr>
-            <a:endParaRPr sz="1100">
+            <a:endParaRPr sz="1100" dirty="0">
               <a:latin typeface="Tahoma"/>
               <a:cs typeface="Tahoma"/>
             </a:endParaRPr>
@@ -30046,11 +31097,18 @@
               <a:t>n </a:t>
             </a:r>
             <a:r>
+              <a:rPr lang="en-US" sz="1100" spc="-30" dirty="0">
+                <a:latin typeface="Tahoma"/>
+                <a:cs typeface="Tahoma"/>
+              </a:rPr>
+              <a:t>columns</a:t>
+            </a:r>
+            <a:r>
               <a:rPr sz="1100" spc="-30" dirty="0">
                 <a:latin typeface="Tahoma"/>
                 <a:cs typeface="Tahoma"/>
               </a:rPr>
-              <a:t>pairs, </a:t>
+              <a:t>, </a:t>
             </a:r>
             <a:r>
               <a:rPr sz="1100" spc="-20" dirty="0">
@@ -30116,6 +31174,13 @@
               <a:t>m</a:t>
             </a:r>
             <a:r>
+              <a:rPr lang="en-US" sz="1100" i="1" spc="-60" dirty="0">
+                <a:latin typeface="Trebuchet MS"/>
+                <a:cs typeface="Trebuchet MS"/>
+              </a:rPr>
+              <a:t> x n</a:t>
+            </a:r>
+            <a:r>
               <a:rPr sz="1100" i="1" spc="-70" dirty="0">
                 <a:latin typeface="Trebuchet MS"/>
                 <a:cs typeface="Trebuchet MS"/>
@@ -30123,41 +31188,20 @@
               <a:t> </a:t>
             </a:r>
             <a:r>
-              <a:rPr sz="1100" spc="-400" dirty="0">
+              <a:rPr lang="en-US" sz="1100" spc="-105" dirty="0">
                 <a:latin typeface="Lucida Sans Unicode"/>
                 <a:cs typeface="Lucida Sans Unicode"/>
               </a:rPr>
-              <a:t>·</a:t>
-            </a:r>
-            <a:r>
-              <a:rPr sz="1100" spc="-105" dirty="0">
-                <a:latin typeface="Lucida Sans Unicode"/>
-                <a:cs typeface="Lucida Sans Unicode"/>
-              </a:rPr>
-              <a:t> </a:t>
-            </a:r>
-            <a:r>
-              <a:rPr sz="1100" i="1" dirty="0">
-                <a:latin typeface="Trebuchet MS"/>
-                <a:cs typeface="Trebuchet MS"/>
-              </a:rPr>
-              <a:t>b</a:t>
-            </a:r>
-            <a:r>
-              <a:rPr sz="1100" i="1" spc="15" dirty="0">
-                <a:latin typeface="Trebuchet MS"/>
-                <a:cs typeface="Trebuchet MS"/>
-              </a:rPr>
-              <a:t> </a:t>
-            </a:r>
-            <a:r>
-              <a:rPr sz="1100" spc="-25" dirty="0">
+              <a:t> </a:t>
+            </a:r>
+            <a:r>
+              <a:rPr lang="en-US" sz="1100" spc="-25" dirty="0">
                 <a:latin typeface="Tahoma"/>
                 <a:cs typeface="Tahoma"/>
               </a:rPr>
               <a:t>pairs</a:t>
             </a:r>
-            <a:endParaRPr sz="1100">
+            <a:endParaRPr sz="1100" dirty="0">
               <a:latin typeface="Tahoma"/>
               <a:cs typeface="Tahoma"/>
             </a:endParaRPr>
@@ -33123,7 +34167,7 @@
               </a:rPr>
               <a:t>1</a:t>
             </a:r>
-            <a:endParaRPr sz="1100">
+            <a:endParaRPr sz="1100" dirty="0">
               <a:latin typeface="Tahoma"/>
               <a:cs typeface="Tahoma"/>
             </a:endParaRPr>
@@ -33250,7 +34294,7 @@
               </a:rPr>
               <a:t>subject?</a:t>
             </a:r>
-            <a:endParaRPr sz="1100">
+            <a:endParaRPr sz="1100" dirty="0">
               <a:latin typeface="Tahoma"/>
               <a:cs typeface="Tahoma"/>
             </a:endParaRPr>
@@ -33705,7 +34749,7 @@
               </a:rPr>
               <a:t>and</a:t>
             </a:r>
-            <a:endParaRPr sz="1100">
+            <a:endParaRPr sz="1100" dirty="0">
               <a:latin typeface="Tahoma"/>
               <a:cs typeface="Tahoma"/>
             </a:endParaRPr>
@@ -33831,7 +34875,7 @@
               </a:rPr>
               <a:t>1</a:t>
             </a:r>
-            <a:endParaRPr sz="1100">
+            <a:endParaRPr sz="1100" dirty="0">
               <a:latin typeface="Tahoma"/>
               <a:cs typeface="Tahoma"/>
             </a:endParaRPr>
@@ -33957,7 +35001,7 @@
               </a:rPr>
               <a:t>15</a:t>
             </a:r>
-            <a:endParaRPr sz="1100">
+            <a:endParaRPr sz="1100" dirty="0">
               <a:latin typeface="Tahoma"/>
               <a:cs typeface="Tahoma"/>
             </a:endParaRPr>
